--- a/presentation/AI_Introduction_for_Beginners.pptx
+++ b/presentation/AI_Introduction_for_Beginners.pptx
@@ -4023,12 +4023,12 @@
         </p:nvSpPr>
         <p:spPr>
           <a:xfrm>
-            <a:off x="425351" y="895201"/>
-            <a:ext cx="3340001" cy="3340001"/>
+            <a:off x="361801" y="1085701"/>
+            <a:ext cx="3467100" cy="3467100"/>
           </a:xfrm>
           <a:prstGeom prst="roundRect">
             <a:avLst>
-              <a:gd name="adj" fmla="val 27377"/>
+              <a:gd name="adj" fmla="val 26374"/>
             </a:avLst>
           </a:prstGeom>
           <a:solidFill>
@@ -4059,24 +4059,24 @@
         </p:nvSpPr>
         <p:spPr>
           <a:xfrm>
-            <a:off x="1079302" y="1015752"/>
-            <a:ext cx="559704" cy="123825"/>
-          </a:xfrm>
-          <a:prstGeom prst="rect">
-            <a:avLst/>
-          </a:prstGeom>
-          <a:noFill/>
-          <a:ln/>
-        </p:spPr>
-        <p:txBody>
-          <a:bodyPr wrap="square" lIns="0" tIns="0" rIns="0" bIns="0" rtlCol="0" anchor="t"/>
-          <a:lstStyle/>
-          <a:p>
-            <a:pPr algn="l" indent="0" marL="0">
-              <a:buNone/>
-            </a:pPr>
-            <a:r>
-              <a:rPr lang="en-US" sz="800" b="1" dirty="0">
+            <a:off x="1837953" y="4190851"/>
+            <a:ext cx="525092" cy="114300"/>
+          </a:xfrm>
+          <a:prstGeom prst="rect">
+            <a:avLst/>
+          </a:prstGeom>
+          <a:noFill/>
+          <a:ln/>
+        </p:spPr>
+        <p:txBody>
+          <a:bodyPr wrap="square" lIns="0" tIns="0" rIns="0" bIns="0" rtlCol="0" anchor="t"/>
+          <a:lstStyle/>
+          <a:p>
+            <a:pPr algn="l" indent="0" marL="0">
+              <a:buNone/>
+            </a:pPr>
+            <a:r>
+              <a:rPr lang="en-US" sz="750" b="1" dirty="0">
                 <a:solidFill>
                   <a:srgbClr val="3B82F6"/>
                 </a:solidFill>
@@ -4086,7 +4086,7 @@
               </a:rPr>
               <a:t>AI (인공지능)</a:t>
             </a:r>
-            <a:endParaRPr lang="en-US" sz="800" dirty="0"/>
+            <a:endParaRPr lang="en-US" sz="750" dirty="0"/>
           </a:p>
         </p:txBody>
       </p:sp>
@@ -4098,12 +4098,12 @@
         </p:nvSpPr>
         <p:spPr>
           <a:xfrm>
-            <a:off x="869752" y="1339602"/>
-            <a:ext cx="2451050" cy="2451050"/>
+            <a:off x="806351" y="1530251"/>
+            <a:ext cx="2578001" cy="2578001"/>
           </a:xfrm>
           <a:prstGeom prst="roundRect">
             <a:avLst>
-              <a:gd name="adj" fmla="val 37306"/>
+              <a:gd name="adj" fmla="val 35469"/>
             </a:avLst>
           </a:prstGeom>
           <a:solidFill>
@@ -4134,7 +4134,7 @@
         </p:nvSpPr>
         <p:spPr>
           <a:xfrm>
-            <a:off x="698302" y="1015752"/>
+            <a:off x="1941537" y="3832027"/>
             <a:ext cx="313780" cy="104775"/>
           </a:xfrm>
           <a:prstGeom prst="rect">
@@ -4173,12 +4173,12 @@
         </p:nvSpPr>
         <p:spPr>
           <a:xfrm>
-            <a:off x="1314152" y="1784003"/>
-            <a:ext cx="1562100" cy="1562100"/>
+            <a:off x="1250752" y="1974652"/>
+            <a:ext cx="1689050" cy="1689050"/>
           </a:xfrm>
           <a:prstGeom prst="roundRect">
             <a:avLst>
-              <a:gd name="adj" fmla="val 58537"/>
+              <a:gd name="adj" fmla="val 54137"/>
             </a:avLst>
           </a:prstGeom>
           <a:solidFill>
@@ -4209,7 +4209,7 @@
         </p:nvSpPr>
         <p:spPr>
           <a:xfrm>
-            <a:off x="596801" y="990451"/>
+            <a:off x="1979861" y="3438376"/>
             <a:ext cx="235297" cy="104775"/>
           </a:xfrm>
           <a:prstGeom prst="rect">
@@ -4248,7 +4248,7 @@
         </p:nvSpPr>
         <p:spPr>
           <a:xfrm>
-            <a:off x="1714202" y="2184053"/>
+            <a:off x="1714202" y="2438102"/>
             <a:ext cx="762000" cy="762000"/>
           </a:xfrm>
           <a:prstGeom prst="roundRect">
@@ -4280,7 +4280,7 @@
         </p:nvSpPr>
         <p:spPr>
           <a:xfrm>
-            <a:off x="2019604" y="2479328"/>
+            <a:off x="2019604" y="2733377"/>
             <a:ext cx="151197" cy="171450"/>
           </a:xfrm>
           <a:prstGeom prst="rect">
@@ -8823,12 +8823,12 @@
         </p:nvSpPr>
         <p:spPr>
           <a:xfrm>
-            <a:off x="317450" y="1244203"/>
-            <a:ext cx="2751683" cy="937320"/>
+            <a:off x="317450" y="1269653"/>
+            <a:ext cx="2751683" cy="1778198"/>
           </a:xfrm>
           <a:prstGeom prst="roundRect">
             <a:avLst>
-              <a:gd name="adj" fmla="val 8130"/>
+              <a:gd name="adj" fmla="val 4285"/>
             </a:avLst>
           </a:prstGeom>
           <a:solidFill>
@@ -8862,8 +8862,8 @@
         </p:nvSpPr>
         <p:spPr>
           <a:xfrm>
-            <a:off x="336500" y="1244203"/>
-            <a:ext cx="0" cy="937320"/>
+            <a:off x="336500" y="1269653"/>
+            <a:ext cx="0" cy="1778198"/>
           </a:xfrm>
           <a:prstGeom prst="line">
             <a:avLst/>
@@ -8885,8 +8885,8 @@
         </p:nvSpPr>
         <p:spPr>
           <a:xfrm>
-            <a:off x="482501" y="1371154"/>
-            <a:ext cx="2508876" cy="123825"/>
+            <a:off x="507950" y="1422053"/>
+            <a:ext cx="2456959" cy="142875"/>
           </a:xfrm>
           <a:prstGeom prst="rect">
             <a:avLst/>
@@ -8900,20 +8900,62 @@
           <a:p>
             <a:pPr algn="l" indent="0" marL="0">
               <a:spcAft>
-                <a:spcPts val="300"/>
+                <a:spcPts val="400"/>
               </a:spcAft>
               <a:buNone/>
             </a:pPr>
             <a:r>
+              <a:rPr lang="en-US" sz="900" b="1" dirty="0">
+                <a:solidFill>
+                  <a:srgbClr val="1E293B"/>
+                </a:solidFill>
+                <a:latin typeface="Arial" pitchFamily="34" charset="0"/>
+                <a:ea typeface="Arial" pitchFamily="34" charset="-122"/>
+                <a:cs typeface="Arial" pitchFamily="34" charset="-120"/>
+              </a:rPr>
+              <a:t>AI 신약 파트너십</a:t>
+            </a:r>
+            <a:endParaRPr lang="en-US" sz="900" dirty="0"/>
+          </a:p>
+        </p:txBody>
+      </p:sp>
+      <p:sp>
+        <p:nvSpPr>
+          <p:cNvPr id="11" name="Text 9"/>
+          <p:cNvSpPr/>
+          <p:nvPr/>
+        </p:nvSpPr>
+        <p:spPr>
+          <a:xfrm>
+            <a:off x="507950" y="1615678"/>
+            <a:ext cx="2456959" cy="123825"/>
+          </a:xfrm>
+          <a:prstGeom prst="rect">
+            <a:avLst/>
+          </a:prstGeom>
+          <a:noFill/>
+          <a:ln/>
+        </p:spPr>
+        <p:txBody>
+          <a:bodyPr wrap="square" lIns="0" tIns="0" rIns="0" bIns="0" rtlCol="0" anchor="t"/>
+          <a:lstStyle/>
+          <a:p>
+            <a:pPr algn="l" indent="0" marL="0">
+              <a:spcAft>
+                <a:spcPts val="500"/>
+              </a:spcAft>
+              <a:buNone/>
+            </a:pPr>
+            <a:r>
               <a:rPr lang="en-US" sz="850" b="1" dirty="0">
                 <a:solidFill>
-                  <a:srgbClr val="1E293B"/>
-                </a:solidFill>
-                <a:latin typeface="Arial" pitchFamily="34" charset="0"/>
-                <a:ea typeface="Arial" pitchFamily="34" charset="-122"/>
-                <a:cs typeface="Arial" pitchFamily="34" charset="-120"/>
-              </a:rPr>
-              <a:t>AI 신약 파트너십</a:t>
+                  <a:srgbClr val="3B82F6"/>
+                </a:solidFill>
+                <a:latin typeface="Arial" pitchFamily="34" charset="0"/>
+                <a:ea typeface="Arial" pitchFamily="34" charset="-122"/>
+                <a:cs typeface="Arial" pitchFamily="34" charset="-120"/>
+              </a:rPr>
+              <a:t>계약 규모 $150억+ (2025)</a:t>
             </a:r>
             <a:endParaRPr lang="en-US" sz="850" dirty="0"/>
           </a:p>
@@ -8921,56 +8963,14 @@
       </p:sp>
       <p:sp>
         <p:nvSpPr>
-          <p:cNvPr id="11" name="Text 9"/>
-          <p:cNvSpPr/>
-          <p:nvPr/>
-        </p:nvSpPr>
-        <p:spPr>
-          <a:xfrm>
-            <a:off x="482501" y="1533079"/>
-            <a:ext cx="2508876" cy="123825"/>
-          </a:xfrm>
-          <a:prstGeom prst="rect">
-            <a:avLst/>
-          </a:prstGeom>
-          <a:noFill/>
-          <a:ln/>
-        </p:spPr>
-        <p:txBody>
-          <a:bodyPr wrap="square" lIns="0" tIns="0" rIns="0" bIns="0" rtlCol="0" anchor="t"/>
-          <a:lstStyle/>
-          <a:p>
-            <a:pPr algn="l" indent="0" marL="0">
-              <a:spcAft>
-                <a:spcPts val="300"/>
-              </a:spcAft>
-              <a:buNone/>
-            </a:pPr>
-            <a:r>
-              <a:rPr lang="en-US" sz="800" b="1" dirty="0">
-                <a:solidFill>
-                  <a:srgbClr val="3B82F6"/>
-                </a:solidFill>
-                <a:latin typeface="Arial" pitchFamily="34" charset="0"/>
-                <a:ea typeface="Arial" pitchFamily="34" charset="-122"/>
-                <a:cs typeface="Arial" pitchFamily="34" charset="-120"/>
-              </a:rPr>
-              <a:t>계약 규모 $150억+ (2025)</a:t>
-            </a:r>
-            <a:endParaRPr lang="en-US" sz="800" dirty="0"/>
-          </a:p>
-        </p:txBody>
-      </p:sp>
-      <p:sp>
-        <p:nvSpPr>
           <p:cNvPr id="12" name="Text 10"/>
           <p:cNvSpPr/>
           <p:nvPr/>
         </p:nvSpPr>
         <p:spPr>
           <a:xfrm>
-            <a:off x="482501" y="1695004"/>
-            <a:ext cx="2508876" cy="248543"/>
+            <a:off x="507950" y="1802904"/>
+            <a:ext cx="2456959" cy="285750"/>
           </a:xfrm>
           <a:prstGeom prst="rect">
             <a:avLst/>
@@ -8984,15 +8984,15 @@
           <a:p>
             <a:pPr algn="l" indent="0" marL="0">
               <a:lnSpc>
-                <a:spcPts val="980"/>
+                <a:spcPts val="1125"/>
               </a:lnSpc>
               <a:spcAft>
-                <a:spcPts val="200"/>
+                <a:spcPts val="400"/>
               </a:spcAft>
               <a:buNone/>
             </a:pPr>
             <a:r>
-              <a:rPr lang="en-US" sz="700" dirty="0">
+              <a:rPr lang="en-US" sz="750" dirty="0">
                 <a:solidFill>
                   <a:srgbClr val="475569"/>
                 </a:solidFill>
@@ -9002,7 +9002,7 @@
               </a:rPr>
               <a:t>빅파마-AI 기업 간 신약 개발 협력이 폭발적으로 증가하며 파이프라인 가속화</a:t>
             </a:r>
-            <a:endParaRPr lang="en-US" sz="700" dirty="0"/>
+            <a:endParaRPr lang="en-US" sz="750" dirty="0"/>
           </a:p>
         </p:txBody>
       </p:sp>
@@ -9014,24 +9014,24 @@
         </p:nvSpPr>
         <p:spPr>
           <a:xfrm>
-            <a:off x="482501" y="1968847"/>
-            <a:ext cx="2508876" cy="85725"/>
-          </a:xfrm>
-          <a:prstGeom prst="rect">
-            <a:avLst/>
-          </a:prstGeom>
-          <a:noFill/>
-          <a:ln/>
-        </p:spPr>
-        <p:txBody>
-          <a:bodyPr wrap="square" lIns="0" tIns="0" rIns="0" bIns="0" rtlCol="0" anchor="t"/>
-          <a:lstStyle/>
-          <a:p>
-            <a:pPr algn="l" indent="0" marL="0">
-              <a:buNone/>
-            </a:pPr>
-            <a:r>
-              <a:rPr lang="en-US" sz="600" i="1" dirty="0">
+            <a:off x="507950" y="2139404"/>
+            <a:ext cx="2456959" cy="95250"/>
+          </a:xfrm>
+          <a:prstGeom prst="rect">
+            <a:avLst/>
+          </a:prstGeom>
+          <a:noFill/>
+          <a:ln/>
+        </p:spPr>
+        <p:txBody>
+          <a:bodyPr wrap="square" lIns="0" tIns="0" rIns="0" bIns="0" rtlCol="0" anchor="t"/>
+          <a:lstStyle/>
+          <a:p>
+            <a:pPr algn="l" indent="0" marL="0">
+              <a:buNone/>
+            </a:pPr>
+            <a:r>
+              <a:rPr lang="en-US" sz="650" i="1" dirty="0">
                 <a:solidFill>
                   <a:srgbClr val="94A3B8"/>
                 </a:solidFill>
@@ -9041,7 +9041,7 @@
               </a:rPr>
               <a:t>Drug Target Review</a:t>
             </a:r>
-            <a:endParaRPr lang="en-US" sz="600" dirty="0"/>
+            <a:endParaRPr lang="en-US" sz="650" dirty="0"/>
           </a:p>
         </p:txBody>
       </p:sp>
@@ -9053,12 +9053,12 @@
         </p:nvSpPr>
         <p:spPr>
           <a:xfrm>
-            <a:off x="317450" y="2283023"/>
-            <a:ext cx="2751683" cy="813048"/>
+            <a:off x="317450" y="3174802"/>
+            <a:ext cx="2751683" cy="1778198"/>
           </a:xfrm>
           <a:prstGeom prst="roundRect">
             <a:avLst>
-              <a:gd name="adj" fmla="val 9372"/>
+              <a:gd name="adj" fmla="val 4285"/>
             </a:avLst>
           </a:prstGeom>
           <a:solidFill>
@@ -9092,8 +9092,8 @@
         </p:nvSpPr>
         <p:spPr>
           <a:xfrm>
-            <a:off x="336500" y="2283023"/>
-            <a:ext cx="0" cy="813048"/>
+            <a:off x="336500" y="3174802"/>
+            <a:ext cx="0" cy="1778198"/>
           </a:xfrm>
           <a:prstGeom prst="line">
             <a:avLst/>
@@ -9115,8 +9115,8 @@
         </p:nvSpPr>
         <p:spPr>
           <a:xfrm>
-            <a:off x="482501" y="2409974"/>
-            <a:ext cx="2508876" cy="123825"/>
+            <a:off x="507950" y="3327202"/>
+            <a:ext cx="2456959" cy="142875"/>
           </a:xfrm>
           <a:prstGeom prst="rect">
             <a:avLst/>
@@ -9130,20 +9130,62 @@
           <a:p>
             <a:pPr algn="l" indent="0" marL="0">
               <a:spcAft>
-                <a:spcPts val="300"/>
+                <a:spcPts val="400"/>
               </a:spcAft>
               <a:buNone/>
             </a:pPr>
             <a:r>
+              <a:rPr lang="en-US" sz="900" b="1" dirty="0">
+                <a:solidFill>
+                  <a:srgbClr val="1E293B"/>
+                </a:solidFill>
+                <a:latin typeface="Arial" pitchFamily="34" charset="0"/>
+                <a:ea typeface="Arial" pitchFamily="34" charset="-122"/>
+                <a:cs typeface="Arial" pitchFamily="34" charset="-120"/>
+              </a:rPr>
+              <a:t>FDA AI 도구 공식 인정</a:t>
+            </a:r>
+            <a:endParaRPr lang="en-US" sz="900" dirty="0"/>
+          </a:p>
+        </p:txBody>
+      </p:sp>
+      <p:sp>
+        <p:nvSpPr>
+          <p:cNvPr id="17" name="Text 15"/>
+          <p:cNvSpPr/>
+          <p:nvPr/>
+        </p:nvSpPr>
+        <p:spPr>
+          <a:xfrm>
+            <a:off x="507950" y="3520827"/>
+            <a:ext cx="2456959" cy="123825"/>
+          </a:xfrm>
+          <a:prstGeom prst="rect">
+            <a:avLst/>
+          </a:prstGeom>
+          <a:noFill/>
+          <a:ln/>
+        </p:spPr>
+        <p:txBody>
+          <a:bodyPr wrap="square" lIns="0" tIns="0" rIns="0" bIns="0" rtlCol="0" anchor="t"/>
+          <a:lstStyle/>
+          <a:p>
+            <a:pPr algn="l" indent="0" marL="0">
+              <a:spcAft>
+                <a:spcPts val="500"/>
+              </a:spcAft>
+              <a:buNone/>
+            </a:pPr>
+            <a:r>
               <a:rPr lang="en-US" sz="850" b="1" dirty="0">
                 <a:solidFill>
-                  <a:srgbClr val="1E293B"/>
-                </a:solidFill>
-                <a:latin typeface="Arial" pitchFamily="34" charset="0"/>
-                <a:ea typeface="Arial" pitchFamily="34" charset="-122"/>
-                <a:cs typeface="Arial" pitchFamily="34" charset="-120"/>
-              </a:rPr>
-              <a:t>FDA AI 도구 공식 인정</a:t>
+                  <a:srgbClr val="3B82F6"/>
+                </a:solidFill>
+                <a:latin typeface="Arial" pitchFamily="34" charset="0"/>
+                <a:ea typeface="Arial" pitchFamily="34" charset="-122"/>
+                <a:cs typeface="Arial" pitchFamily="34" charset="-120"/>
+              </a:rPr>
+              <a:t>최초 공식 인정 (2025.12)</a:t>
             </a:r>
             <a:endParaRPr lang="en-US" sz="850" dirty="0"/>
           </a:p>
@@ -9151,56 +9193,14 @@
       </p:sp>
       <p:sp>
         <p:nvSpPr>
-          <p:cNvPr id="17" name="Text 15"/>
-          <p:cNvSpPr/>
-          <p:nvPr/>
-        </p:nvSpPr>
-        <p:spPr>
-          <a:xfrm>
-            <a:off x="482501" y="2571899"/>
-            <a:ext cx="2508876" cy="123825"/>
-          </a:xfrm>
-          <a:prstGeom prst="rect">
-            <a:avLst/>
-          </a:prstGeom>
-          <a:noFill/>
-          <a:ln/>
-        </p:spPr>
-        <p:txBody>
-          <a:bodyPr wrap="square" lIns="0" tIns="0" rIns="0" bIns="0" rtlCol="0" anchor="t"/>
-          <a:lstStyle/>
-          <a:p>
-            <a:pPr algn="l" indent="0" marL="0">
-              <a:spcAft>
-                <a:spcPts val="300"/>
-              </a:spcAft>
-              <a:buNone/>
-            </a:pPr>
-            <a:r>
-              <a:rPr lang="en-US" sz="800" b="1" dirty="0">
-                <a:solidFill>
-                  <a:srgbClr val="3B82F6"/>
-                </a:solidFill>
-                <a:latin typeface="Arial" pitchFamily="34" charset="0"/>
-                <a:ea typeface="Arial" pitchFamily="34" charset="-122"/>
-                <a:cs typeface="Arial" pitchFamily="34" charset="-120"/>
-              </a:rPr>
-              <a:t>최초 공식 인정 (2025.12)</a:t>
-            </a:r>
-            <a:endParaRPr lang="en-US" sz="800" dirty="0"/>
-          </a:p>
-        </p:txBody>
-      </p:sp>
-      <p:sp>
-        <p:nvSpPr>
           <p:cNvPr id="18" name="Text 16"/>
           <p:cNvSpPr/>
           <p:nvPr/>
         </p:nvSpPr>
         <p:spPr>
           <a:xfrm>
-            <a:off x="482501" y="2733824"/>
-            <a:ext cx="2508876" cy="124271"/>
+            <a:off x="507950" y="3708053"/>
+            <a:ext cx="2456959" cy="285750"/>
           </a:xfrm>
           <a:prstGeom prst="rect">
             <a:avLst/>
@@ -9214,15 +9214,15 @@
           <a:p>
             <a:pPr algn="l" indent="0" marL="0">
               <a:lnSpc>
-                <a:spcPts val="980"/>
+                <a:spcPts val="1125"/>
               </a:lnSpc>
               <a:spcAft>
-                <a:spcPts val="200"/>
+                <a:spcPts val="400"/>
               </a:spcAft>
               <a:buNone/>
             </a:pPr>
             <a:r>
-              <a:rPr lang="en-US" sz="700" dirty="0">
+              <a:rPr lang="en-US" sz="750" dirty="0">
                 <a:solidFill>
                   <a:srgbClr val="475569"/>
                 </a:solidFill>
@@ -9232,7 +9232,7 @@
               </a:rPr>
               <a:t>FDA가 AI 기반 임상 의사결정 도구를 공식 인정, 규제 패러다임 전환</a:t>
             </a:r>
-            <a:endParaRPr lang="en-US" sz="700" dirty="0"/>
+            <a:endParaRPr lang="en-US" sz="750" dirty="0"/>
           </a:p>
         </p:txBody>
       </p:sp>
@@ -9244,24 +9244,24 @@
         </p:nvSpPr>
         <p:spPr>
           <a:xfrm>
-            <a:off x="482501" y="2883396"/>
-            <a:ext cx="2508876" cy="85725"/>
-          </a:xfrm>
-          <a:prstGeom prst="rect">
-            <a:avLst/>
-          </a:prstGeom>
-          <a:noFill/>
-          <a:ln/>
-        </p:spPr>
-        <p:txBody>
-          <a:bodyPr wrap="square" lIns="0" tIns="0" rIns="0" bIns="0" rtlCol="0" anchor="t"/>
-          <a:lstStyle/>
-          <a:p>
-            <a:pPr algn="l" indent="0" marL="0">
-              <a:buNone/>
-            </a:pPr>
-            <a:r>
-              <a:rPr lang="en-US" sz="600" i="1" dirty="0">
+            <a:off x="507950" y="4044553"/>
+            <a:ext cx="2456959" cy="95250"/>
+          </a:xfrm>
+          <a:prstGeom prst="rect">
+            <a:avLst/>
+          </a:prstGeom>
+          <a:noFill/>
+          <a:ln/>
+        </p:spPr>
+        <p:txBody>
+          <a:bodyPr wrap="square" lIns="0" tIns="0" rIns="0" bIns="0" rtlCol="0" anchor="t"/>
+          <a:lstStyle/>
+          <a:p>
+            <a:pPr algn="l" indent="0" marL="0">
+              <a:buNone/>
+            </a:pPr>
+            <a:r>
+              <a:rPr lang="en-US" sz="650" i="1" dirty="0">
                 <a:solidFill>
                   <a:srgbClr val="94A3B8"/>
                 </a:solidFill>
@@ -9271,7 +9271,7 @@
               </a:rPr>
               <a:t>FDA</a:t>
             </a:r>
-            <a:endParaRPr lang="en-US" sz="600" dirty="0"/>
+            <a:endParaRPr lang="en-US" sz="650" dirty="0"/>
           </a:p>
         </p:txBody>
       </p:sp>
@@ -9354,12 +9354,12 @@
         </p:nvSpPr>
         <p:spPr>
           <a:xfrm>
-            <a:off x="3196084" y="1244203"/>
-            <a:ext cx="2751683" cy="813048"/>
+            <a:off x="3196084" y="1269653"/>
+            <a:ext cx="2751683" cy="1778198"/>
           </a:xfrm>
           <a:prstGeom prst="roundRect">
             <a:avLst>
-              <a:gd name="adj" fmla="val 9372"/>
+              <a:gd name="adj" fmla="val 4285"/>
             </a:avLst>
           </a:prstGeom>
           <a:solidFill>
@@ -9393,8 +9393,8 @@
         </p:nvSpPr>
         <p:spPr>
           <a:xfrm>
-            <a:off x="3215134" y="1244203"/>
-            <a:ext cx="0" cy="813048"/>
+            <a:off x="3215134" y="1269653"/>
+            <a:ext cx="0" cy="1778198"/>
           </a:xfrm>
           <a:prstGeom prst="line">
             <a:avLst/>
@@ -9416,8 +9416,8 @@
         </p:nvSpPr>
         <p:spPr>
           <a:xfrm>
-            <a:off x="3361134" y="1371154"/>
-            <a:ext cx="2508876" cy="123825"/>
+            <a:off x="3386584" y="1422053"/>
+            <a:ext cx="2456959" cy="142875"/>
           </a:xfrm>
           <a:prstGeom prst="rect">
             <a:avLst/>
@@ -9431,20 +9431,62 @@
           <a:p>
             <a:pPr algn="l" indent="0" marL="0">
               <a:spcAft>
-                <a:spcPts val="300"/>
+                <a:spcPts val="400"/>
               </a:spcAft>
               <a:buNone/>
             </a:pPr>
             <a:r>
+              <a:rPr lang="en-US" sz="900" b="1" dirty="0">
+                <a:solidFill>
+                  <a:srgbClr val="1E293B"/>
+                </a:solidFill>
+                <a:latin typeface="Arial" pitchFamily="34" charset="0"/>
+                <a:ea typeface="Arial" pitchFamily="34" charset="-122"/>
+                <a:cs typeface="Arial" pitchFamily="34" charset="-120"/>
+              </a:rPr>
+              <a:t>AI 사기 탐지</a:t>
+            </a:r>
+            <a:endParaRPr lang="en-US" sz="900" dirty="0"/>
+          </a:p>
+        </p:txBody>
+      </p:sp>
+      <p:sp>
+        <p:nvSpPr>
+          <p:cNvPr id="25" name="Text 23"/>
+          <p:cNvSpPr/>
+          <p:nvPr/>
+        </p:nvSpPr>
+        <p:spPr>
+          <a:xfrm>
+            <a:off x="3386584" y="1615678"/>
+            <a:ext cx="2456959" cy="123825"/>
+          </a:xfrm>
+          <a:prstGeom prst="rect">
+            <a:avLst/>
+          </a:prstGeom>
+          <a:noFill/>
+          <a:ln/>
+        </p:spPr>
+        <p:txBody>
+          <a:bodyPr wrap="square" lIns="0" tIns="0" rIns="0" bIns="0" rtlCol="0" anchor="t"/>
+          <a:lstStyle/>
+          <a:p>
+            <a:pPr algn="l" indent="0" marL="0">
+              <a:spcAft>
+                <a:spcPts val="500"/>
+              </a:spcAft>
+              <a:buNone/>
+            </a:pPr>
+            <a:r>
               <a:rPr lang="en-US" sz="850" b="1" dirty="0">
                 <a:solidFill>
-                  <a:srgbClr val="1E293B"/>
-                </a:solidFill>
-                <a:latin typeface="Arial" pitchFamily="34" charset="0"/>
-                <a:ea typeface="Arial" pitchFamily="34" charset="-122"/>
-                <a:cs typeface="Arial" pitchFamily="34" charset="-120"/>
-              </a:rPr>
-              <a:t>AI 사기 탐지</a:t>
+                  <a:srgbClr val="06B6D4"/>
+                </a:solidFill>
+                <a:latin typeface="Arial" pitchFamily="34" charset="0"/>
+                <a:ea typeface="Arial" pitchFamily="34" charset="-122"/>
+                <a:cs typeface="Arial" pitchFamily="34" charset="-120"/>
+              </a:rPr>
+              <a:t>은행 90%가 도입</a:t>
             </a:r>
             <a:endParaRPr lang="en-US" sz="850" dirty="0"/>
           </a:p>
@@ -9452,56 +9494,14 @@
       </p:sp>
       <p:sp>
         <p:nvSpPr>
-          <p:cNvPr id="25" name="Text 23"/>
-          <p:cNvSpPr/>
-          <p:nvPr/>
-        </p:nvSpPr>
-        <p:spPr>
-          <a:xfrm>
-            <a:off x="3361134" y="1533079"/>
-            <a:ext cx="2508876" cy="123825"/>
-          </a:xfrm>
-          <a:prstGeom prst="rect">
-            <a:avLst/>
-          </a:prstGeom>
-          <a:noFill/>
-          <a:ln/>
-        </p:spPr>
-        <p:txBody>
-          <a:bodyPr wrap="square" lIns="0" tIns="0" rIns="0" bIns="0" rtlCol="0" anchor="t"/>
-          <a:lstStyle/>
-          <a:p>
-            <a:pPr algn="l" indent="0" marL="0">
-              <a:spcAft>
-                <a:spcPts val="300"/>
-              </a:spcAft>
-              <a:buNone/>
-            </a:pPr>
-            <a:r>
-              <a:rPr lang="en-US" sz="800" b="1" dirty="0">
-                <a:solidFill>
-                  <a:srgbClr val="06B6D4"/>
-                </a:solidFill>
-                <a:latin typeface="Arial" pitchFamily="34" charset="0"/>
-                <a:ea typeface="Arial" pitchFamily="34" charset="-122"/>
-                <a:cs typeface="Arial" pitchFamily="34" charset="-120"/>
-              </a:rPr>
-              <a:t>은행 90%가 도입</a:t>
-            </a:r>
-            <a:endParaRPr lang="en-US" sz="800" dirty="0"/>
-          </a:p>
-        </p:txBody>
-      </p:sp>
-      <p:sp>
-        <p:nvSpPr>
           <p:cNvPr id="26" name="Text 24"/>
           <p:cNvSpPr/>
           <p:nvPr/>
         </p:nvSpPr>
         <p:spPr>
           <a:xfrm>
-            <a:off x="3361134" y="1695004"/>
-            <a:ext cx="2508876" cy="124271"/>
+            <a:off x="3386584" y="1802904"/>
+            <a:ext cx="2456959" cy="142875"/>
           </a:xfrm>
           <a:prstGeom prst="rect">
             <a:avLst/>
@@ -9515,15 +9515,15 @@
           <a:p>
             <a:pPr algn="l" indent="0" marL="0">
               <a:lnSpc>
-                <a:spcPts val="980"/>
+                <a:spcPts val="1125"/>
               </a:lnSpc>
               <a:spcAft>
-                <a:spcPts val="200"/>
+                <a:spcPts val="400"/>
               </a:spcAft>
               <a:buNone/>
             </a:pPr>
             <a:r>
-              <a:rPr lang="en-US" sz="700" dirty="0">
+              <a:rPr lang="en-US" sz="750" dirty="0">
                 <a:solidFill>
                   <a:srgbClr val="475569"/>
                 </a:solidFill>
@@ -9533,7 +9533,7 @@
               </a:rPr>
               <a:t>전체 은행의 2/3는 최근 2년 내 AI 사기 탐지 시스템을 도입</a:t>
             </a:r>
-            <a:endParaRPr lang="en-US" sz="700" dirty="0"/>
+            <a:endParaRPr lang="en-US" sz="750" dirty="0"/>
           </a:p>
         </p:txBody>
       </p:sp>
@@ -9545,24 +9545,24 @@
         </p:nvSpPr>
         <p:spPr>
           <a:xfrm>
-            <a:off x="3361134" y="1844576"/>
-            <a:ext cx="2508876" cy="85725"/>
-          </a:xfrm>
-          <a:prstGeom prst="rect">
-            <a:avLst/>
-          </a:prstGeom>
-          <a:noFill/>
-          <a:ln/>
-        </p:spPr>
-        <p:txBody>
-          <a:bodyPr wrap="square" lIns="0" tIns="0" rIns="0" bIns="0" rtlCol="0" anchor="t"/>
-          <a:lstStyle/>
-          <a:p>
-            <a:pPr algn="l" indent="0" marL="0">
-              <a:buNone/>
-            </a:pPr>
-            <a:r>
-              <a:rPr lang="en-US" sz="600" i="1" dirty="0">
+            <a:off x="3386584" y="1996529"/>
+            <a:ext cx="2456959" cy="95250"/>
+          </a:xfrm>
+          <a:prstGeom prst="rect">
+            <a:avLst/>
+          </a:prstGeom>
+          <a:noFill/>
+          <a:ln/>
+        </p:spPr>
+        <p:txBody>
+          <a:bodyPr wrap="square" lIns="0" tIns="0" rIns="0" bIns="0" rtlCol="0" anchor="t"/>
+          <a:lstStyle/>
+          <a:p>
+            <a:pPr algn="l" indent="0" marL="0">
+              <a:buNone/>
+            </a:pPr>
+            <a:r>
+              <a:rPr lang="en-US" sz="650" i="1" dirty="0">
                 <a:solidFill>
                   <a:srgbClr val="94A3B8"/>
                 </a:solidFill>
@@ -9572,7 +9572,7 @@
               </a:rPr>
               <a:t>Feedzai</a:t>
             </a:r>
-            <a:endParaRPr lang="en-US" sz="600" dirty="0"/>
+            <a:endParaRPr lang="en-US" sz="650" dirty="0"/>
           </a:p>
         </p:txBody>
       </p:sp>
@@ -9584,12 +9584,12 @@
         </p:nvSpPr>
         <p:spPr>
           <a:xfrm>
-            <a:off x="3196084" y="2158752"/>
-            <a:ext cx="2751683" cy="813048"/>
+            <a:off x="3196084" y="3174802"/>
+            <a:ext cx="2751683" cy="1778198"/>
           </a:xfrm>
           <a:prstGeom prst="roundRect">
             <a:avLst>
-              <a:gd name="adj" fmla="val 9372"/>
+              <a:gd name="adj" fmla="val 4285"/>
             </a:avLst>
           </a:prstGeom>
           <a:solidFill>
@@ -9623,8 +9623,8 @@
         </p:nvSpPr>
         <p:spPr>
           <a:xfrm>
-            <a:off x="3215134" y="2158752"/>
-            <a:ext cx="0" cy="813048"/>
+            <a:off x="3215134" y="3174802"/>
+            <a:ext cx="0" cy="1778198"/>
           </a:xfrm>
           <a:prstGeom prst="line">
             <a:avLst/>
@@ -9646,8 +9646,8 @@
         </p:nvSpPr>
         <p:spPr>
           <a:xfrm>
-            <a:off x="3361134" y="2285702"/>
-            <a:ext cx="2508876" cy="123825"/>
+            <a:off x="3386584" y="3327202"/>
+            <a:ext cx="2456959" cy="142875"/>
           </a:xfrm>
           <a:prstGeom prst="rect">
             <a:avLst/>
@@ -9661,20 +9661,62 @@
           <a:p>
             <a:pPr algn="l" indent="0" marL="0">
               <a:spcAft>
-                <a:spcPts val="300"/>
+                <a:spcPts val="400"/>
               </a:spcAft>
               <a:buNone/>
             </a:pPr>
             <a:r>
+              <a:rPr lang="en-US" sz="900" b="1" dirty="0">
+                <a:solidFill>
+                  <a:srgbClr val="1E293B"/>
+                </a:solidFill>
+                <a:latin typeface="Arial" pitchFamily="34" charset="0"/>
+                <a:ea typeface="Arial" pitchFamily="34" charset="-122"/>
+                <a:cs typeface="Arial" pitchFamily="34" charset="-120"/>
+              </a:rPr>
+              <a:t>허위 거절 감소</a:t>
+            </a:r>
+            <a:endParaRPr lang="en-US" sz="900" dirty="0"/>
+          </a:p>
+        </p:txBody>
+      </p:sp>
+      <p:sp>
+        <p:nvSpPr>
+          <p:cNvPr id="31" name="Text 29"/>
+          <p:cNvSpPr/>
+          <p:nvPr/>
+        </p:nvSpPr>
+        <p:spPr>
+          <a:xfrm>
+            <a:off x="3386584" y="3520827"/>
+            <a:ext cx="2456959" cy="123825"/>
+          </a:xfrm>
+          <a:prstGeom prst="rect">
+            <a:avLst/>
+          </a:prstGeom>
+          <a:noFill/>
+          <a:ln/>
+        </p:spPr>
+        <p:txBody>
+          <a:bodyPr wrap="square" lIns="0" tIns="0" rIns="0" bIns="0" rtlCol="0" anchor="t"/>
+          <a:lstStyle/>
+          <a:p>
+            <a:pPr algn="l" indent="0" marL="0">
+              <a:spcAft>
+                <a:spcPts val="500"/>
+              </a:spcAft>
+              <a:buNone/>
+            </a:pPr>
+            <a:r>
               <a:rPr lang="en-US" sz="850" b="1" dirty="0">
                 <a:solidFill>
-                  <a:srgbClr val="1E293B"/>
-                </a:solidFill>
-                <a:latin typeface="Arial" pitchFamily="34" charset="0"/>
-                <a:ea typeface="Arial" pitchFamily="34" charset="-122"/>
-                <a:cs typeface="Arial" pitchFamily="34" charset="-120"/>
-              </a:rPr>
-              <a:t>허위 거절 감소</a:t>
+                  <a:srgbClr val="06B6D4"/>
+                </a:solidFill>
+                <a:latin typeface="Arial" pitchFamily="34" charset="0"/>
+                <a:ea typeface="Arial" pitchFamily="34" charset="-122"/>
+                <a:cs typeface="Arial" pitchFamily="34" charset="-120"/>
+              </a:rPr>
+              <a:t>30%+ 감소</a:t>
             </a:r>
             <a:endParaRPr lang="en-US" sz="850" dirty="0"/>
           </a:p>
@@ -9682,56 +9724,14 @@
       </p:sp>
       <p:sp>
         <p:nvSpPr>
-          <p:cNvPr id="31" name="Text 29"/>
-          <p:cNvSpPr/>
-          <p:nvPr/>
-        </p:nvSpPr>
-        <p:spPr>
-          <a:xfrm>
-            <a:off x="3361134" y="2447627"/>
-            <a:ext cx="2508876" cy="123825"/>
-          </a:xfrm>
-          <a:prstGeom prst="rect">
-            <a:avLst/>
-          </a:prstGeom>
-          <a:noFill/>
-          <a:ln/>
-        </p:spPr>
-        <p:txBody>
-          <a:bodyPr wrap="square" lIns="0" tIns="0" rIns="0" bIns="0" rtlCol="0" anchor="t"/>
-          <a:lstStyle/>
-          <a:p>
-            <a:pPr algn="l" indent="0" marL="0">
-              <a:spcAft>
-                <a:spcPts val="300"/>
-              </a:spcAft>
-              <a:buNone/>
-            </a:pPr>
-            <a:r>
-              <a:rPr lang="en-US" sz="800" b="1" dirty="0">
-                <a:solidFill>
-                  <a:srgbClr val="06B6D4"/>
-                </a:solidFill>
-                <a:latin typeface="Arial" pitchFamily="34" charset="0"/>
-                <a:ea typeface="Arial" pitchFamily="34" charset="-122"/>
-                <a:cs typeface="Arial" pitchFamily="34" charset="-120"/>
-              </a:rPr>
-              <a:t>30%+ 감소</a:t>
-            </a:r>
-            <a:endParaRPr lang="en-US" sz="800" dirty="0"/>
-          </a:p>
-        </p:txBody>
-      </p:sp>
-      <p:sp>
-        <p:nvSpPr>
           <p:cNvPr id="32" name="Text 30"/>
           <p:cNvSpPr/>
           <p:nvPr/>
         </p:nvSpPr>
         <p:spPr>
           <a:xfrm>
-            <a:off x="3361134" y="2609552"/>
-            <a:ext cx="2508876" cy="124271"/>
+            <a:off x="3386584" y="3708053"/>
+            <a:ext cx="2456959" cy="142875"/>
           </a:xfrm>
           <a:prstGeom prst="rect">
             <a:avLst/>
@@ -9745,15 +9745,15 @@
           <a:p>
             <a:pPr algn="l" indent="0" marL="0">
               <a:lnSpc>
-                <a:spcPts val="980"/>
+                <a:spcPts val="1125"/>
               </a:lnSpc>
               <a:spcAft>
-                <a:spcPts val="200"/>
+                <a:spcPts val="400"/>
               </a:spcAft>
               <a:buNone/>
             </a:pPr>
             <a:r>
-              <a:rPr lang="en-US" sz="700" dirty="0">
+              <a:rPr lang="en-US" sz="750" dirty="0">
                 <a:solidFill>
                   <a:srgbClr val="475569"/>
                 </a:solidFill>
@@ -9763,7 +9763,7 @@
               </a:rPr>
               <a:t>AI 도입으로 정상 거래를 사기로 잘못 차단하는 비율이 크게 감소</a:t>
             </a:r>
-            <a:endParaRPr lang="en-US" sz="700" dirty="0"/>
+            <a:endParaRPr lang="en-US" sz="750" dirty="0"/>
           </a:p>
         </p:txBody>
       </p:sp>
@@ -9775,24 +9775,24 @@
         </p:nvSpPr>
         <p:spPr>
           <a:xfrm>
-            <a:off x="3361134" y="2759125"/>
-            <a:ext cx="2508876" cy="85725"/>
-          </a:xfrm>
-          <a:prstGeom prst="rect">
-            <a:avLst/>
-          </a:prstGeom>
-          <a:noFill/>
-          <a:ln/>
-        </p:spPr>
-        <p:txBody>
-          <a:bodyPr wrap="square" lIns="0" tIns="0" rIns="0" bIns="0" rtlCol="0" anchor="t"/>
-          <a:lstStyle/>
-          <a:p>
-            <a:pPr algn="l" indent="0" marL="0">
-              <a:buNone/>
-            </a:pPr>
-            <a:r>
-              <a:rPr lang="en-US" sz="600" i="1" dirty="0">
+            <a:off x="3386584" y="3901678"/>
+            <a:ext cx="2456959" cy="95250"/>
+          </a:xfrm>
+          <a:prstGeom prst="rect">
+            <a:avLst/>
+          </a:prstGeom>
+          <a:noFill/>
+          <a:ln/>
+        </p:spPr>
+        <p:txBody>
+          <a:bodyPr wrap="square" lIns="0" tIns="0" rIns="0" bIns="0" rtlCol="0" anchor="t"/>
+          <a:lstStyle/>
+          <a:p>
+            <a:pPr algn="l" indent="0" marL="0">
+              <a:buNone/>
+            </a:pPr>
+            <a:r>
+              <a:rPr lang="en-US" sz="650" i="1" dirty="0">
                 <a:solidFill>
                   <a:srgbClr val="94A3B8"/>
                 </a:solidFill>
@@ -9802,7 +9802,7 @@
               </a:rPr>
               <a:t>IBM</a:t>
             </a:r>
-            <a:endParaRPr lang="en-US" sz="600" dirty="0"/>
+            <a:endParaRPr lang="en-US" sz="650" dirty="0"/>
           </a:p>
         </p:txBody>
       </p:sp>
@@ -9885,12 +9885,12 @@
         </p:nvSpPr>
         <p:spPr>
           <a:xfrm>
-            <a:off x="6074718" y="1244203"/>
-            <a:ext cx="2751683" cy="803523"/>
+            <a:off x="6074718" y="1269653"/>
+            <a:ext cx="2751683" cy="1778198"/>
           </a:xfrm>
           <a:prstGeom prst="roundRect">
             <a:avLst>
-              <a:gd name="adj" fmla="val 9483"/>
+              <a:gd name="adj" fmla="val 4285"/>
             </a:avLst>
           </a:prstGeom>
           <a:solidFill>
@@ -9924,8 +9924,8 @@
         </p:nvSpPr>
         <p:spPr>
           <a:xfrm>
-            <a:off x="6093768" y="1244203"/>
-            <a:ext cx="0" cy="803523"/>
+            <a:off x="6093768" y="1269653"/>
+            <a:ext cx="0" cy="1778198"/>
           </a:xfrm>
           <a:prstGeom prst="line">
             <a:avLst/>
@@ -9947,8 +9947,8 @@
         </p:nvSpPr>
         <p:spPr>
           <a:xfrm>
-            <a:off x="6239768" y="1371154"/>
-            <a:ext cx="2508876" cy="114300"/>
+            <a:off x="6265218" y="1422053"/>
+            <a:ext cx="2456959" cy="133350"/>
           </a:xfrm>
           <a:prstGeom prst="rect">
             <a:avLst/>
@@ -9962,20 +9962,62 @@
           <a:p>
             <a:pPr algn="l" indent="0" marL="0">
               <a:spcAft>
-                <a:spcPts val="300"/>
+                <a:spcPts val="400"/>
               </a:spcAft>
               <a:buNone/>
             </a:pPr>
             <a:r>
+              <a:rPr lang="en-US" sz="900" b="1" dirty="0">
+                <a:solidFill>
+                  <a:srgbClr val="1E293B"/>
+                </a:solidFill>
+                <a:latin typeface="Arial" pitchFamily="34" charset="0"/>
+                <a:ea typeface="Arial" pitchFamily="34" charset="-122"/>
+                <a:cs typeface="Arial" pitchFamily="34" charset="-120"/>
+              </a:rPr>
+              <a:t>Figure 02 x BMW</a:t>
+            </a:r>
+            <a:endParaRPr lang="en-US" sz="900" dirty="0"/>
+          </a:p>
+        </p:txBody>
+      </p:sp>
+      <p:sp>
+        <p:nvSpPr>
+          <p:cNvPr id="39" name="Text 37"/>
+          <p:cNvSpPr/>
+          <p:nvPr/>
+        </p:nvSpPr>
+        <p:spPr>
+          <a:xfrm>
+            <a:off x="6265218" y="1606153"/>
+            <a:ext cx="2456959" cy="123825"/>
+          </a:xfrm>
+          <a:prstGeom prst="rect">
+            <a:avLst/>
+          </a:prstGeom>
+          <a:noFill/>
+          <a:ln/>
+        </p:spPr>
+        <p:txBody>
+          <a:bodyPr wrap="square" lIns="0" tIns="0" rIns="0" bIns="0" rtlCol="0" anchor="t"/>
+          <a:lstStyle/>
+          <a:p>
+            <a:pPr algn="l" indent="0" marL="0">
+              <a:spcAft>
+                <a:spcPts val="500"/>
+              </a:spcAft>
+              <a:buNone/>
+            </a:pPr>
+            <a:r>
               <a:rPr lang="en-US" sz="850" b="1" dirty="0">
                 <a:solidFill>
-                  <a:srgbClr val="1E293B"/>
-                </a:solidFill>
-                <a:latin typeface="Arial" pitchFamily="34" charset="0"/>
-                <a:ea typeface="Arial" pitchFamily="34" charset="-122"/>
-                <a:cs typeface="Arial" pitchFamily="34" charset="-120"/>
-              </a:rPr>
-              <a:t>Figure 02 x BMW</a:t>
+                  <a:srgbClr val="F59E0B"/>
+                </a:solidFill>
+                <a:latin typeface="Arial" pitchFamily="34" charset="0"/>
+                <a:ea typeface="Arial" pitchFamily="34" charset="-122"/>
+                <a:cs typeface="Arial" pitchFamily="34" charset="-120"/>
+              </a:rPr>
+              <a:t>3만대 생산, 부품 9만개</a:t>
             </a:r>
             <a:endParaRPr lang="en-US" sz="850" dirty="0"/>
           </a:p>
@@ -9983,56 +10025,14 @@
       </p:sp>
       <p:sp>
         <p:nvSpPr>
-          <p:cNvPr id="39" name="Text 37"/>
-          <p:cNvSpPr/>
-          <p:nvPr/>
-        </p:nvSpPr>
-        <p:spPr>
-          <a:xfrm>
-            <a:off x="6239768" y="1523554"/>
-            <a:ext cx="2508876" cy="123825"/>
-          </a:xfrm>
-          <a:prstGeom prst="rect">
-            <a:avLst/>
-          </a:prstGeom>
-          <a:noFill/>
-          <a:ln/>
-        </p:spPr>
-        <p:txBody>
-          <a:bodyPr wrap="square" lIns="0" tIns="0" rIns="0" bIns="0" rtlCol="0" anchor="t"/>
-          <a:lstStyle/>
-          <a:p>
-            <a:pPr algn="l" indent="0" marL="0">
-              <a:spcAft>
-                <a:spcPts val="300"/>
-              </a:spcAft>
-              <a:buNone/>
-            </a:pPr>
-            <a:r>
-              <a:rPr lang="en-US" sz="800" b="1" dirty="0">
-                <a:solidFill>
-                  <a:srgbClr val="F59E0B"/>
-                </a:solidFill>
-                <a:latin typeface="Arial" pitchFamily="34" charset="0"/>
-                <a:ea typeface="Arial" pitchFamily="34" charset="-122"/>
-                <a:cs typeface="Arial" pitchFamily="34" charset="-120"/>
-              </a:rPr>
-              <a:t>3만대 생산, 부품 9만개</a:t>
-            </a:r>
-            <a:endParaRPr lang="en-US" sz="800" dirty="0"/>
-          </a:p>
-        </p:txBody>
-      </p:sp>
-      <p:sp>
-        <p:nvSpPr>
           <p:cNvPr id="40" name="Text 38"/>
           <p:cNvSpPr/>
           <p:nvPr/>
         </p:nvSpPr>
         <p:spPr>
           <a:xfrm>
-            <a:off x="6239768" y="1685479"/>
-            <a:ext cx="2508876" cy="124271"/>
+            <a:off x="6265218" y="1793379"/>
+            <a:ext cx="2456959" cy="285750"/>
           </a:xfrm>
           <a:prstGeom prst="rect">
             <a:avLst/>
@@ -10046,15 +10046,15 @@
           <a:p>
             <a:pPr algn="l" indent="0" marL="0">
               <a:lnSpc>
-                <a:spcPts val="980"/>
+                <a:spcPts val="1125"/>
               </a:lnSpc>
               <a:spcAft>
-                <a:spcPts val="200"/>
+                <a:spcPts val="400"/>
               </a:spcAft>
               <a:buNone/>
             </a:pPr>
             <a:r>
-              <a:rPr lang="en-US" sz="700" dirty="0">
+              <a:rPr lang="en-US" sz="750" dirty="0">
                 <a:solidFill>
                   <a:srgbClr val="475569"/>
                 </a:solidFill>
@@ -10064,7 +10064,7 @@
               </a:rPr>
               <a:t>정확도 99%+ 달성. 휴머노이드 로봇이 자동차 조립라인에 실전 투입</a:t>
             </a:r>
-            <a:endParaRPr lang="en-US" sz="700" dirty="0"/>
+            <a:endParaRPr lang="en-US" sz="750" dirty="0"/>
           </a:p>
         </p:txBody>
       </p:sp>
@@ -10076,24 +10076,24 @@
         </p:nvSpPr>
         <p:spPr>
           <a:xfrm>
-            <a:off x="6239768" y="1835051"/>
-            <a:ext cx="2508876" cy="85725"/>
-          </a:xfrm>
-          <a:prstGeom prst="rect">
-            <a:avLst/>
-          </a:prstGeom>
-          <a:noFill/>
-          <a:ln/>
-        </p:spPr>
-        <p:txBody>
-          <a:bodyPr wrap="square" lIns="0" tIns="0" rIns="0" bIns="0" rtlCol="0" anchor="t"/>
-          <a:lstStyle/>
-          <a:p>
-            <a:pPr algn="l" indent="0" marL="0">
-              <a:buNone/>
-            </a:pPr>
-            <a:r>
-              <a:rPr lang="en-US" sz="600" i="1" dirty="0">
+            <a:off x="6265218" y="2129879"/>
+            <a:ext cx="2456959" cy="95250"/>
+          </a:xfrm>
+          <a:prstGeom prst="rect">
+            <a:avLst/>
+          </a:prstGeom>
+          <a:noFill/>
+          <a:ln/>
+        </p:spPr>
+        <p:txBody>
+          <a:bodyPr wrap="square" lIns="0" tIns="0" rIns="0" bIns="0" rtlCol="0" anchor="t"/>
+          <a:lstStyle/>
+          <a:p>
+            <a:pPr algn="l" indent="0" marL="0">
+              <a:buNone/>
+            </a:pPr>
+            <a:r>
+              <a:rPr lang="en-US" sz="650" i="1" dirty="0">
                 <a:solidFill>
                   <a:srgbClr val="94A3B8"/>
                 </a:solidFill>
@@ -10103,7 +10103,7 @@
               </a:rPr>
               <a:t>Figure AI</a:t>
             </a:r>
-            <a:endParaRPr lang="en-US" sz="600" dirty="0"/>
+            <a:endParaRPr lang="en-US" sz="650" dirty="0"/>
           </a:p>
         </p:txBody>
       </p:sp>
@@ -10115,12 +10115,12 @@
         </p:nvSpPr>
         <p:spPr>
           <a:xfrm>
-            <a:off x="6074718" y="2149227"/>
-            <a:ext cx="2751683" cy="813048"/>
+            <a:off x="6074718" y="3174802"/>
+            <a:ext cx="2751683" cy="1778198"/>
           </a:xfrm>
           <a:prstGeom prst="roundRect">
             <a:avLst>
-              <a:gd name="adj" fmla="val 9372"/>
+              <a:gd name="adj" fmla="val 4285"/>
             </a:avLst>
           </a:prstGeom>
           <a:solidFill>
@@ -10154,8 +10154,8 @@
         </p:nvSpPr>
         <p:spPr>
           <a:xfrm>
-            <a:off x="6093768" y="2149227"/>
-            <a:ext cx="0" cy="813048"/>
+            <a:off x="6093768" y="3174802"/>
+            <a:ext cx="0" cy="1778198"/>
           </a:xfrm>
           <a:prstGeom prst="line">
             <a:avLst/>
@@ -10177,8 +10177,8 @@
         </p:nvSpPr>
         <p:spPr>
           <a:xfrm>
-            <a:off x="6239768" y="2276177"/>
-            <a:ext cx="2508876" cy="123825"/>
+            <a:off x="6265218" y="3327202"/>
+            <a:ext cx="2456959" cy="142875"/>
           </a:xfrm>
           <a:prstGeom prst="rect">
             <a:avLst/>
@@ -10192,20 +10192,62 @@
           <a:p>
             <a:pPr algn="l" indent="0" marL="0">
               <a:spcAft>
-                <a:spcPts val="300"/>
+                <a:spcPts val="400"/>
               </a:spcAft>
               <a:buNone/>
             </a:pPr>
             <a:r>
+              <a:rPr lang="en-US" sz="900" b="1" dirty="0">
+                <a:solidFill>
+                  <a:srgbClr val="1E293B"/>
+                </a:solidFill>
+                <a:latin typeface="Arial" pitchFamily="34" charset="0"/>
+                <a:ea typeface="Arial" pitchFamily="34" charset="-122"/>
+                <a:cs typeface="Arial" pitchFamily="34" charset="-120"/>
+              </a:rPr>
+              <a:t>BotQ 양산 계획</a:t>
+            </a:r>
+            <a:endParaRPr lang="en-US" sz="900" dirty="0"/>
+          </a:p>
+        </p:txBody>
+      </p:sp>
+      <p:sp>
+        <p:nvSpPr>
+          <p:cNvPr id="45" name="Text 43"/>
+          <p:cNvSpPr/>
+          <p:nvPr/>
+        </p:nvSpPr>
+        <p:spPr>
+          <a:xfrm>
+            <a:off x="6265218" y="3520827"/>
+            <a:ext cx="2456959" cy="123825"/>
+          </a:xfrm>
+          <a:prstGeom prst="rect">
+            <a:avLst/>
+          </a:prstGeom>
+          <a:noFill/>
+          <a:ln/>
+        </p:spPr>
+        <p:txBody>
+          <a:bodyPr wrap="square" lIns="0" tIns="0" rIns="0" bIns="0" rtlCol="0" anchor="t"/>
+          <a:lstStyle/>
+          <a:p>
+            <a:pPr algn="l" indent="0" marL="0">
+              <a:spcAft>
+                <a:spcPts val="500"/>
+              </a:spcAft>
+              <a:buNone/>
+            </a:pPr>
+            <a:r>
               <a:rPr lang="en-US" sz="850" b="1" dirty="0">
                 <a:solidFill>
-                  <a:srgbClr val="1E293B"/>
-                </a:solidFill>
-                <a:latin typeface="Arial" pitchFamily="34" charset="0"/>
-                <a:ea typeface="Arial" pitchFamily="34" charset="-122"/>
-                <a:cs typeface="Arial" pitchFamily="34" charset="-120"/>
-              </a:rPr>
-              <a:t>BotQ 양산 계획</a:t>
+                  <a:srgbClr val="F59E0B"/>
+                </a:solidFill>
+                <a:latin typeface="Arial" pitchFamily="34" charset="0"/>
+                <a:ea typeface="Arial" pitchFamily="34" charset="-122"/>
+                <a:cs typeface="Arial" pitchFamily="34" charset="-120"/>
+              </a:rPr>
+              <a:t>연 12,000대 생산</a:t>
             </a:r>
             <a:endParaRPr lang="en-US" sz="850" dirty="0"/>
           </a:p>
@@ -10213,56 +10255,14 @@
       </p:sp>
       <p:sp>
         <p:nvSpPr>
-          <p:cNvPr id="45" name="Text 43"/>
-          <p:cNvSpPr/>
-          <p:nvPr/>
-        </p:nvSpPr>
-        <p:spPr>
-          <a:xfrm>
-            <a:off x="6239768" y="2438102"/>
-            <a:ext cx="2508876" cy="123825"/>
-          </a:xfrm>
-          <a:prstGeom prst="rect">
-            <a:avLst/>
-          </a:prstGeom>
-          <a:noFill/>
-          <a:ln/>
-        </p:spPr>
-        <p:txBody>
-          <a:bodyPr wrap="square" lIns="0" tIns="0" rIns="0" bIns="0" rtlCol="0" anchor="t"/>
-          <a:lstStyle/>
-          <a:p>
-            <a:pPr algn="l" indent="0" marL="0">
-              <a:spcAft>
-                <a:spcPts val="300"/>
-              </a:spcAft>
-              <a:buNone/>
-            </a:pPr>
-            <a:r>
-              <a:rPr lang="en-US" sz="800" b="1" dirty="0">
-                <a:solidFill>
-                  <a:srgbClr val="F59E0B"/>
-                </a:solidFill>
-                <a:latin typeface="Arial" pitchFamily="34" charset="0"/>
-                <a:ea typeface="Arial" pitchFamily="34" charset="-122"/>
-                <a:cs typeface="Arial" pitchFamily="34" charset="-120"/>
-              </a:rPr>
-              <a:t>연 12,000대 생산</a:t>
-            </a:r>
-            <a:endParaRPr lang="en-US" sz="800" dirty="0"/>
-          </a:p>
-        </p:txBody>
-      </p:sp>
-      <p:sp>
-        <p:nvSpPr>
           <p:cNvPr id="46" name="Text 44"/>
           <p:cNvSpPr/>
           <p:nvPr/>
         </p:nvSpPr>
         <p:spPr>
           <a:xfrm>
-            <a:off x="6239768" y="2600027"/>
-            <a:ext cx="2508876" cy="124271"/>
+            <a:off x="6265218" y="3708053"/>
+            <a:ext cx="2456959" cy="142875"/>
           </a:xfrm>
           <a:prstGeom prst="rect">
             <a:avLst/>
@@ -10276,15 +10276,15 @@
           <a:p>
             <a:pPr algn="l" indent="0" marL="0">
               <a:lnSpc>
-                <a:spcPts val="980"/>
+                <a:spcPts val="1125"/>
               </a:lnSpc>
               <a:spcAft>
-                <a:spcPts val="200"/>
+                <a:spcPts val="400"/>
               </a:spcAft>
               <a:buNone/>
             </a:pPr>
             <a:r>
-              <a:rPr lang="en-US" sz="700" dirty="0">
+              <a:rPr lang="en-US" sz="750" dirty="0">
                 <a:solidFill>
                   <a:srgbClr val="475569"/>
                 </a:solidFill>
@@ -10294,7 +10294,7 @@
               </a:rPr>
               <a:t>4년 내 연간 10만대 규모로 확대 목표</a:t>
             </a:r>
-            <a:endParaRPr lang="en-US" sz="700" dirty="0"/>
+            <a:endParaRPr lang="en-US" sz="750" dirty="0"/>
           </a:p>
         </p:txBody>
       </p:sp>
@@ -10306,24 +10306,24 @@
         </p:nvSpPr>
         <p:spPr>
           <a:xfrm>
-            <a:off x="6239768" y="2749600"/>
-            <a:ext cx="2508876" cy="85725"/>
-          </a:xfrm>
-          <a:prstGeom prst="rect">
-            <a:avLst/>
-          </a:prstGeom>
-          <a:noFill/>
-          <a:ln/>
-        </p:spPr>
-        <p:txBody>
-          <a:bodyPr wrap="square" lIns="0" tIns="0" rIns="0" bIns="0" rtlCol="0" anchor="t"/>
-          <a:lstStyle/>
-          <a:p>
-            <a:pPr algn="l" indent="0" marL="0">
-              <a:buNone/>
-            </a:pPr>
-            <a:r>
-              <a:rPr lang="en-US" sz="600" i="1" dirty="0">
+            <a:off x="6265218" y="3901678"/>
+            <a:ext cx="2456959" cy="95250"/>
+          </a:xfrm>
+          <a:prstGeom prst="rect">
+            <a:avLst/>
+          </a:prstGeom>
+          <a:noFill/>
+          <a:ln/>
+        </p:spPr>
+        <p:txBody>
+          <a:bodyPr wrap="square" lIns="0" tIns="0" rIns="0" bIns="0" rtlCol="0" anchor="t"/>
+          <a:lstStyle/>
+          <a:p>
+            <a:pPr algn="l" indent="0" marL="0">
+              <a:buNone/>
+            </a:pPr>
+            <a:r>
+              <a:rPr lang="en-US" sz="650" i="1" dirty="0">
                 <a:solidFill>
                   <a:srgbClr val="94A3B8"/>
                 </a:solidFill>
@@ -10333,7 +10333,7 @@
               </a:rPr>
               <a:t>Figure AI</a:t>
             </a:r>
-            <a:endParaRPr lang="en-US" sz="600" dirty="0"/>
+            <a:endParaRPr lang="en-US" sz="650" dirty="0"/>
           </a:p>
         </p:txBody>
       </p:sp>

--- a/presentation/AI_Introduction_for_Beginners.pptx
+++ b/presentation/AI_Introduction_for_Beginners.pptx
@@ -5547,7 +5547,7 @@
         </p:nvSpPr>
         <p:spPr>
           <a:xfrm>
-            <a:off x="444401" y="2412950"/>
+            <a:off x="444401" y="2793950"/>
             <a:ext cx="8254901" cy="38100"/>
           </a:xfrm>
           <a:prstGeom prst="roundRect">
@@ -5579,12 +5579,12 @@
         </p:nvSpPr>
         <p:spPr>
           <a:xfrm>
-            <a:off x="190500" y="1041350"/>
-            <a:ext cx="990600" cy="488603"/>
+            <a:off x="190500" y="1269950"/>
+            <a:ext cx="990600" cy="650528"/>
           </a:xfrm>
           <a:prstGeom prst="roundRect">
             <a:avLst>
-              <a:gd name="adj" fmla="val 12996"/>
+              <a:gd name="adj" fmla="val 9761"/>
             </a:avLst>
           </a:prstGeom>
           <a:solidFill>
@@ -5618,8 +5618,8 @@
         </p:nvSpPr>
         <p:spPr>
           <a:xfrm>
-            <a:off x="245263" y="1104751"/>
-            <a:ext cx="881074" cy="133350"/>
+            <a:off x="284125" y="1371451"/>
+            <a:ext cx="803350" cy="133350"/>
           </a:xfrm>
           <a:prstGeom prst="rect">
             <a:avLst/>
@@ -5657,8 +5657,8 @@
         </p:nvSpPr>
         <p:spPr>
           <a:xfrm>
-            <a:off x="245263" y="1263402"/>
-            <a:ext cx="881074" cy="104775"/>
+            <a:off x="284125" y="1530102"/>
+            <a:ext cx="803350" cy="104775"/>
           </a:xfrm>
           <a:prstGeom prst="rect">
             <a:avLst/>
@@ -5699,8 +5699,8 @@
         </p:nvSpPr>
         <p:spPr>
           <a:xfrm>
-            <a:off x="245263" y="1380827"/>
-            <a:ext cx="881074" cy="85725"/>
+            <a:off x="284125" y="1647527"/>
+            <a:ext cx="803350" cy="171450"/>
           </a:xfrm>
           <a:prstGeom prst="rect">
             <a:avLst/>
@@ -5741,7 +5741,7 @@
         </p:nvSpPr>
         <p:spPr>
           <a:xfrm>
-            <a:off x="596950" y="1593354"/>
+            <a:off x="596950" y="1983879"/>
             <a:ext cx="177701" cy="177701"/>
           </a:xfrm>
           <a:prstGeom prst="roundRect">
@@ -5773,7 +5773,7 @@
         </p:nvSpPr>
         <p:spPr>
           <a:xfrm>
-            <a:off x="1714500" y="2336750"/>
+            <a:off x="1714500" y="2717750"/>
             <a:ext cx="177701" cy="177701"/>
           </a:xfrm>
           <a:prstGeom prst="roundRect">
@@ -5805,12 +5805,12 @@
         </p:nvSpPr>
         <p:spPr>
           <a:xfrm>
-            <a:off x="1308050" y="2577852"/>
-            <a:ext cx="990600" cy="488603"/>
+            <a:off x="1308050" y="2958852"/>
+            <a:ext cx="990600" cy="564803"/>
           </a:xfrm>
           <a:prstGeom prst="roundRect">
             <a:avLst>
-              <a:gd name="adj" fmla="val 12996"/>
+              <a:gd name="adj" fmla="val 11243"/>
             </a:avLst>
           </a:prstGeom>
           <a:solidFill>
@@ -5844,8 +5844,8 @@
         </p:nvSpPr>
         <p:spPr>
           <a:xfrm>
-            <a:off x="1362813" y="2641253"/>
-            <a:ext cx="881074" cy="133350"/>
+            <a:off x="1401675" y="3060353"/>
+            <a:ext cx="803350" cy="133350"/>
           </a:xfrm>
           <a:prstGeom prst="rect">
             <a:avLst/>
@@ -5883,8 +5883,8 @@
         </p:nvSpPr>
         <p:spPr>
           <a:xfrm>
-            <a:off x="1362813" y="2799904"/>
-            <a:ext cx="881074" cy="104775"/>
+            <a:off x="1401675" y="3219004"/>
+            <a:ext cx="803350" cy="104775"/>
           </a:xfrm>
           <a:prstGeom prst="rect">
             <a:avLst/>
@@ -5925,8 +5925,8 @@
         </p:nvSpPr>
         <p:spPr>
           <a:xfrm>
-            <a:off x="1362813" y="2917329"/>
-            <a:ext cx="881074" cy="85725"/>
+            <a:off x="1401675" y="3336429"/>
+            <a:ext cx="803350" cy="85725"/>
           </a:xfrm>
           <a:prstGeom prst="rect">
             <a:avLst/>
@@ -5967,12 +5967,12 @@
         </p:nvSpPr>
         <p:spPr>
           <a:xfrm>
-            <a:off x="2425601" y="1041350"/>
-            <a:ext cx="990600" cy="488603"/>
+            <a:off x="2425601" y="1269950"/>
+            <a:ext cx="990600" cy="564803"/>
           </a:xfrm>
           <a:prstGeom prst="roundRect">
             <a:avLst>
-              <a:gd name="adj" fmla="val 12996"/>
+              <a:gd name="adj" fmla="val 11243"/>
             </a:avLst>
           </a:prstGeom>
           <a:solidFill>
@@ -6006,8 +6006,8 @@
         </p:nvSpPr>
         <p:spPr>
           <a:xfrm>
-            <a:off x="2480364" y="1104751"/>
-            <a:ext cx="881074" cy="133350"/>
+            <a:off x="2519226" y="1371451"/>
+            <a:ext cx="803350" cy="133350"/>
           </a:xfrm>
           <a:prstGeom prst="rect">
             <a:avLst/>
@@ -6045,8 +6045,8 @@
         </p:nvSpPr>
         <p:spPr>
           <a:xfrm>
-            <a:off x="2480364" y="1263402"/>
-            <a:ext cx="881074" cy="104775"/>
+            <a:off x="2519226" y="1530102"/>
+            <a:ext cx="803350" cy="104775"/>
           </a:xfrm>
           <a:prstGeom prst="rect">
             <a:avLst/>
@@ -6087,8 +6087,8 @@
         </p:nvSpPr>
         <p:spPr>
           <a:xfrm>
-            <a:off x="2480364" y="1380827"/>
-            <a:ext cx="881074" cy="85725"/>
+            <a:off x="2519226" y="1647527"/>
+            <a:ext cx="803350" cy="85725"/>
           </a:xfrm>
           <a:prstGeom prst="rect">
             <a:avLst/>
@@ -6129,7 +6129,7 @@
         </p:nvSpPr>
         <p:spPr>
           <a:xfrm>
-            <a:off x="2832050" y="1593354"/>
+            <a:off x="2832050" y="1898154"/>
             <a:ext cx="177701" cy="177701"/>
           </a:xfrm>
           <a:prstGeom prst="roundRect">
@@ -6161,7 +6161,7 @@
         </p:nvSpPr>
         <p:spPr>
           <a:xfrm>
-            <a:off x="3949750" y="2336750"/>
+            <a:off x="3949750" y="2717750"/>
             <a:ext cx="177701" cy="177701"/>
           </a:xfrm>
           <a:prstGeom prst="roundRect">
@@ -6193,12 +6193,12 @@
         </p:nvSpPr>
         <p:spPr>
           <a:xfrm>
-            <a:off x="3543300" y="2577852"/>
-            <a:ext cx="990600" cy="488603"/>
+            <a:off x="3543300" y="2958852"/>
+            <a:ext cx="990600" cy="564803"/>
           </a:xfrm>
           <a:prstGeom prst="roundRect">
             <a:avLst>
-              <a:gd name="adj" fmla="val 12996"/>
+              <a:gd name="adj" fmla="val 11243"/>
             </a:avLst>
           </a:prstGeom>
           <a:solidFill>
@@ -6232,8 +6232,8 @@
         </p:nvSpPr>
         <p:spPr>
           <a:xfrm>
-            <a:off x="3598063" y="2641253"/>
-            <a:ext cx="881074" cy="133350"/>
+            <a:off x="3636925" y="3060353"/>
+            <a:ext cx="803350" cy="133350"/>
           </a:xfrm>
           <a:prstGeom prst="rect">
             <a:avLst/>
@@ -6271,8 +6271,8 @@
         </p:nvSpPr>
         <p:spPr>
           <a:xfrm>
-            <a:off x="3598063" y="2799904"/>
-            <a:ext cx="881074" cy="104775"/>
+            <a:off x="3636925" y="3219004"/>
+            <a:ext cx="803350" cy="104775"/>
           </a:xfrm>
           <a:prstGeom prst="rect">
             <a:avLst/>
@@ -6313,8 +6313,8 @@
         </p:nvSpPr>
         <p:spPr>
           <a:xfrm>
-            <a:off x="3598063" y="2917329"/>
-            <a:ext cx="881074" cy="85725"/>
+            <a:off x="3636925" y="3336429"/>
+            <a:ext cx="803350" cy="85725"/>
           </a:xfrm>
           <a:prstGeom prst="rect">
             <a:avLst/>
@@ -6355,12 +6355,12 @@
         </p:nvSpPr>
         <p:spPr>
           <a:xfrm>
-            <a:off x="4660850" y="1041350"/>
-            <a:ext cx="990600" cy="479078"/>
+            <a:off x="4660850" y="1269950"/>
+            <a:ext cx="990600" cy="555278"/>
           </a:xfrm>
           <a:prstGeom prst="roundRect">
             <a:avLst>
-              <a:gd name="adj" fmla="val 13255"/>
+              <a:gd name="adj" fmla="val 11436"/>
             </a:avLst>
           </a:prstGeom>
           <a:solidFill>
@@ -6394,8 +6394,8 @@
         </p:nvSpPr>
         <p:spPr>
           <a:xfrm>
-            <a:off x="4715613" y="1104751"/>
-            <a:ext cx="881074" cy="133350"/>
+            <a:off x="4754475" y="1371451"/>
+            <a:ext cx="803350" cy="133350"/>
           </a:xfrm>
           <a:prstGeom prst="rect">
             <a:avLst/>
@@ -6433,8 +6433,8 @@
         </p:nvSpPr>
         <p:spPr>
           <a:xfrm>
-            <a:off x="4715613" y="1263402"/>
-            <a:ext cx="881074" cy="95250"/>
+            <a:off x="4754475" y="1530102"/>
+            <a:ext cx="803350" cy="95250"/>
           </a:xfrm>
           <a:prstGeom prst="rect">
             <a:avLst/>
@@ -6475,8 +6475,8 @@
         </p:nvSpPr>
         <p:spPr>
           <a:xfrm>
-            <a:off x="4715613" y="1371302"/>
-            <a:ext cx="881074" cy="85725"/>
+            <a:off x="4754475" y="1638002"/>
+            <a:ext cx="803350" cy="85725"/>
           </a:xfrm>
           <a:prstGeom prst="rect">
             <a:avLst/>
@@ -6517,7 +6517,7 @@
         </p:nvSpPr>
         <p:spPr>
           <a:xfrm>
-            <a:off x="5067300" y="1583829"/>
+            <a:off x="5067300" y="1888629"/>
             <a:ext cx="177701" cy="177701"/>
           </a:xfrm>
           <a:prstGeom prst="roundRect">
@@ -6549,7 +6549,7 @@
         </p:nvSpPr>
         <p:spPr>
           <a:xfrm>
-            <a:off x="6184850" y="2336750"/>
+            <a:off x="6184850" y="2717750"/>
             <a:ext cx="177701" cy="177701"/>
           </a:xfrm>
           <a:prstGeom prst="roundRect">
@@ -6581,12 +6581,12 @@
         </p:nvSpPr>
         <p:spPr>
           <a:xfrm>
-            <a:off x="5778401" y="2577852"/>
-            <a:ext cx="990600" cy="488603"/>
+            <a:off x="5778401" y="2958852"/>
+            <a:ext cx="990600" cy="564803"/>
           </a:xfrm>
           <a:prstGeom prst="roundRect">
             <a:avLst>
-              <a:gd name="adj" fmla="val 12996"/>
+              <a:gd name="adj" fmla="val 11243"/>
             </a:avLst>
           </a:prstGeom>
           <a:solidFill>
@@ -6620,8 +6620,8 @@
         </p:nvSpPr>
         <p:spPr>
           <a:xfrm>
-            <a:off x="5833164" y="2641253"/>
-            <a:ext cx="881074" cy="133350"/>
+            <a:off x="5872026" y="3060353"/>
+            <a:ext cx="803350" cy="133350"/>
           </a:xfrm>
           <a:prstGeom prst="rect">
             <a:avLst/>
@@ -6659,8 +6659,8 @@
         </p:nvSpPr>
         <p:spPr>
           <a:xfrm>
-            <a:off x="5833164" y="2799904"/>
-            <a:ext cx="881074" cy="104775"/>
+            <a:off x="5872026" y="3219004"/>
+            <a:ext cx="803350" cy="104775"/>
           </a:xfrm>
           <a:prstGeom prst="rect">
             <a:avLst/>
@@ -6701,8 +6701,8 @@
         </p:nvSpPr>
         <p:spPr>
           <a:xfrm>
-            <a:off x="5833164" y="2917329"/>
-            <a:ext cx="881074" cy="85725"/>
+            <a:off x="5872026" y="3336429"/>
+            <a:ext cx="803350" cy="85725"/>
           </a:xfrm>
           <a:prstGeom prst="rect">
             <a:avLst/>
@@ -6743,12 +6743,12 @@
         </p:nvSpPr>
         <p:spPr>
           <a:xfrm>
-            <a:off x="6896100" y="863501"/>
-            <a:ext cx="990600" cy="612428"/>
+            <a:off x="6896100" y="1066800"/>
+            <a:ext cx="990600" cy="688628"/>
           </a:xfrm>
           <a:prstGeom prst="roundRect">
             <a:avLst>
-              <a:gd name="adj" fmla="val 10369"/>
+              <a:gd name="adj" fmla="val 9221"/>
             </a:avLst>
           </a:prstGeom>
           <a:solidFill>
@@ -6786,8 +6786,8 @@
         </p:nvSpPr>
         <p:spPr>
           <a:xfrm>
-            <a:off x="6970294" y="945952"/>
-            <a:ext cx="842212" cy="133350"/>
+            <a:off x="7009156" y="1187351"/>
+            <a:ext cx="764488" cy="133350"/>
           </a:xfrm>
           <a:prstGeom prst="rect">
             <a:avLst/>
@@ -6825,8 +6825,8 @@
         </p:nvSpPr>
         <p:spPr>
           <a:xfrm>
-            <a:off x="6970294" y="1104602"/>
-            <a:ext cx="842212" cy="104775"/>
+            <a:off x="7009156" y="1346002"/>
+            <a:ext cx="764488" cy="104775"/>
           </a:xfrm>
           <a:prstGeom prst="rect">
             <a:avLst/>
@@ -6867,8 +6867,8 @@
         </p:nvSpPr>
         <p:spPr>
           <a:xfrm>
-            <a:off x="6970294" y="1222028"/>
-            <a:ext cx="842212" cy="171450"/>
+            <a:off x="7009156" y="1463427"/>
+            <a:ext cx="764488" cy="171450"/>
           </a:xfrm>
           <a:prstGeom prst="rect">
             <a:avLst/>
@@ -6909,7 +6909,7 @@
         </p:nvSpPr>
         <p:spPr>
           <a:xfrm>
-            <a:off x="7302550" y="1539329"/>
+            <a:off x="7302550" y="1818829"/>
             <a:ext cx="177701" cy="177701"/>
           </a:xfrm>
           <a:prstGeom prst="roundRect">
@@ -10657,7 +10657,7 @@
         <p:spPr>
           <a:xfrm>
             <a:off x="317450" y="787301"/>
-            <a:ext cx="1207145" cy="279202"/>
+            <a:ext cx="2705100" cy="279202"/>
           </a:xfrm>
           <a:prstGeom prst="roundRect">
             <a:avLst>
@@ -10689,7 +10689,7 @@
         <p:spPr>
           <a:xfrm>
             <a:off x="444401" y="850702"/>
-            <a:ext cx="972309" cy="152400"/>
+            <a:ext cx="2500223" cy="152400"/>
           </a:xfrm>
           <a:prstGeom prst="rect">
             <a:avLst/>
@@ -10728,11 +10728,11 @@
         <p:spPr>
           <a:xfrm>
             <a:off x="317450" y="1155353"/>
-            <a:ext cx="2705100" cy="828377"/>
+            <a:ext cx="2705100" cy="1822549"/>
           </a:xfrm>
           <a:prstGeom prst="roundRect">
             <a:avLst>
-              <a:gd name="adj" fmla="val 9199"/>
+              <a:gd name="adj" fmla="val 4181"/>
             </a:avLst>
           </a:prstGeom>
           <a:solidFill>
@@ -10767,7 +10767,7 @@
         <p:spPr>
           <a:xfrm>
             <a:off x="336500" y="1155353"/>
-            <a:ext cx="0" cy="828377"/>
+            <a:ext cx="0" cy="1822549"/>
           </a:xfrm>
           <a:prstGeom prst="line">
             <a:avLst/>
@@ -10789,8 +10789,8 @@
         </p:nvSpPr>
         <p:spPr>
           <a:xfrm>
-            <a:off x="482501" y="1256854"/>
-            <a:ext cx="2461361" cy="142875"/>
+            <a:off x="507950" y="1282303"/>
+            <a:ext cx="2409444" cy="142875"/>
           </a:xfrm>
           <a:prstGeom prst="rect">
             <a:avLst/>
@@ -10831,8 +10831,8 @@
         </p:nvSpPr>
         <p:spPr>
           <a:xfrm>
-            <a:off x="482501" y="1437829"/>
-            <a:ext cx="2461361" cy="114300"/>
+            <a:off x="507950" y="1463278"/>
+            <a:ext cx="2409444" cy="114300"/>
           </a:xfrm>
           <a:prstGeom prst="rect">
             <a:avLst/>
@@ -10870,8 +10870,8 @@
         </p:nvSpPr>
         <p:spPr>
           <a:xfrm>
-            <a:off x="482501" y="1577429"/>
-            <a:ext cx="2461361" cy="161925"/>
+            <a:off x="507950" y="1602879"/>
+            <a:ext cx="2409444" cy="161925"/>
           </a:xfrm>
           <a:prstGeom prst="rect">
             <a:avLst/>
@@ -10912,8 +10912,8 @@
         </p:nvSpPr>
         <p:spPr>
           <a:xfrm>
-            <a:off x="482501" y="1777454"/>
-            <a:ext cx="2461361" cy="104775"/>
+            <a:off x="507950" y="1802904"/>
+            <a:ext cx="2409444" cy="104775"/>
           </a:xfrm>
           <a:prstGeom prst="rect">
             <a:avLst/>
@@ -10954,12 +10954,12 @@
         </p:nvSpPr>
         <p:spPr>
           <a:xfrm>
-            <a:off x="317450" y="2059930"/>
-            <a:ext cx="2705100" cy="828377"/>
+            <a:off x="317450" y="3054102"/>
+            <a:ext cx="2705100" cy="1822698"/>
           </a:xfrm>
           <a:prstGeom prst="roundRect">
             <a:avLst>
-              <a:gd name="adj" fmla="val 9199"/>
+              <a:gd name="adj" fmla="val 4181"/>
             </a:avLst>
           </a:prstGeom>
           <a:solidFill>
@@ -10993,8 +10993,8 @@
         </p:nvSpPr>
         <p:spPr>
           <a:xfrm>
-            <a:off x="336500" y="2059930"/>
-            <a:ext cx="0" cy="828377"/>
+            <a:off x="336500" y="3054102"/>
+            <a:ext cx="0" cy="1822698"/>
           </a:xfrm>
           <a:prstGeom prst="line">
             <a:avLst/>
@@ -11016,8 +11016,8 @@
         </p:nvSpPr>
         <p:spPr>
           <a:xfrm>
-            <a:off x="482501" y="2161431"/>
-            <a:ext cx="2461361" cy="142875"/>
+            <a:off x="507950" y="3181052"/>
+            <a:ext cx="2409444" cy="142875"/>
           </a:xfrm>
           <a:prstGeom prst="rect">
             <a:avLst/>
@@ -11058,8 +11058,8 @@
         </p:nvSpPr>
         <p:spPr>
           <a:xfrm>
-            <a:off x="482501" y="2342406"/>
-            <a:ext cx="2461361" cy="114300"/>
+            <a:off x="507950" y="3362027"/>
+            <a:ext cx="2409444" cy="114300"/>
           </a:xfrm>
           <a:prstGeom prst="rect">
             <a:avLst/>
@@ -11097,8 +11097,8 @@
         </p:nvSpPr>
         <p:spPr>
           <a:xfrm>
-            <a:off x="482501" y="2482007"/>
-            <a:ext cx="2461361" cy="161925"/>
+            <a:off x="507950" y="3501628"/>
+            <a:ext cx="2409444" cy="161925"/>
           </a:xfrm>
           <a:prstGeom prst="rect">
             <a:avLst/>
@@ -11139,8 +11139,8 @@
         </p:nvSpPr>
         <p:spPr>
           <a:xfrm>
-            <a:off x="482501" y="2682032"/>
-            <a:ext cx="2461361" cy="104775"/>
+            <a:off x="507950" y="3701653"/>
+            <a:ext cx="2409444" cy="104775"/>
           </a:xfrm>
           <a:prstGeom prst="rect">
             <a:avLst/>
@@ -11182,7 +11182,7 @@
         <p:spPr>
           <a:xfrm>
             <a:off x="3174950" y="787301"/>
-            <a:ext cx="1182886" cy="279202"/>
+            <a:ext cx="2705100" cy="279202"/>
           </a:xfrm>
           <a:prstGeom prst="roundRect">
             <a:avLst>
@@ -11214,7 +11214,7 @@
         <p:spPr>
           <a:xfrm>
             <a:off x="3301901" y="850702"/>
-            <a:ext cx="947565" cy="152400"/>
+            <a:ext cx="2500223" cy="152400"/>
           </a:xfrm>
           <a:prstGeom prst="rect">
             <a:avLst/>
@@ -11253,11 +11253,11 @@
         <p:spPr>
           <a:xfrm>
             <a:off x="3174950" y="1155353"/>
-            <a:ext cx="2705100" cy="641152"/>
+            <a:ext cx="2705100" cy="1189583"/>
           </a:xfrm>
           <a:prstGeom prst="roundRect">
             <a:avLst>
-              <a:gd name="adj" fmla="val 11885"/>
+              <a:gd name="adj" fmla="val 6406"/>
             </a:avLst>
           </a:prstGeom>
           <a:solidFill>
@@ -11292,7 +11292,7 @@
         <p:spPr>
           <a:xfrm>
             <a:off x="3194000" y="1155353"/>
-            <a:ext cx="0" cy="641152"/>
+            <a:ext cx="0" cy="1189583"/>
           </a:xfrm>
           <a:prstGeom prst="line">
             <a:avLst/>
@@ -11314,8 +11314,8 @@
         </p:nvSpPr>
         <p:spPr>
           <a:xfrm>
-            <a:off x="3340001" y="1256854"/>
-            <a:ext cx="2461361" cy="133350"/>
+            <a:off x="3365450" y="1282303"/>
+            <a:ext cx="2409444" cy="133350"/>
           </a:xfrm>
           <a:prstGeom prst="rect">
             <a:avLst/>
@@ -11356,8 +11356,8 @@
         </p:nvSpPr>
         <p:spPr>
           <a:xfrm>
-            <a:off x="3340001" y="1428304"/>
-            <a:ext cx="2461361" cy="114300"/>
+            <a:off x="3365450" y="1453753"/>
+            <a:ext cx="2409444" cy="114300"/>
           </a:xfrm>
           <a:prstGeom prst="rect">
             <a:avLst/>
@@ -11395,8 +11395,8 @@
         </p:nvSpPr>
         <p:spPr>
           <a:xfrm>
-            <a:off x="3340001" y="1580704"/>
-            <a:ext cx="2461361" cy="114300"/>
+            <a:off x="3365450" y="1606153"/>
+            <a:ext cx="2409444" cy="114300"/>
           </a:xfrm>
           <a:prstGeom prst="rect">
             <a:avLst/>
@@ -11437,12 +11437,12 @@
         </p:nvSpPr>
         <p:spPr>
           <a:xfrm>
-            <a:off x="3174950" y="1872704"/>
-            <a:ext cx="2705100" cy="641152"/>
+            <a:off x="3174950" y="2421136"/>
+            <a:ext cx="2705100" cy="1189732"/>
           </a:xfrm>
           <a:prstGeom prst="roundRect">
             <a:avLst>
-              <a:gd name="adj" fmla="val 11885"/>
+              <a:gd name="adj" fmla="val 6405"/>
             </a:avLst>
           </a:prstGeom>
           <a:solidFill>
@@ -11476,8 +11476,8 @@
         </p:nvSpPr>
         <p:spPr>
           <a:xfrm>
-            <a:off x="3194000" y="1872704"/>
-            <a:ext cx="0" cy="641152"/>
+            <a:off x="3194000" y="2421136"/>
+            <a:ext cx="0" cy="1189732"/>
           </a:xfrm>
           <a:prstGeom prst="line">
             <a:avLst/>
@@ -11499,8 +11499,8 @@
         </p:nvSpPr>
         <p:spPr>
           <a:xfrm>
-            <a:off x="3340001" y="1974205"/>
-            <a:ext cx="2461361" cy="133350"/>
+            <a:off x="3365450" y="2548086"/>
+            <a:ext cx="2409444" cy="133350"/>
           </a:xfrm>
           <a:prstGeom prst="rect">
             <a:avLst/>
@@ -11541,8 +11541,8 @@
         </p:nvSpPr>
         <p:spPr>
           <a:xfrm>
-            <a:off x="3340001" y="2145655"/>
-            <a:ext cx="2461361" cy="114300"/>
+            <a:off x="3365450" y="2719536"/>
+            <a:ext cx="2409444" cy="114300"/>
           </a:xfrm>
           <a:prstGeom prst="rect">
             <a:avLst/>
@@ -11580,8 +11580,8 @@
         </p:nvSpPr>
         <p:spPr>
           <a:xfrm>
-            <a:off x="3340001" y="2298055"/>
-            <a:ext cx="2461361" cy="114300"/>
+            <a:off x="3365450" y="2871936"/>
+            <a:ext cx="2409444" cy="114300"/>
           </a:xfrm>
           <a:prstGeom prst="rect">
             <a:avLst/>
@@ -11622,12 +11622,12 @@
         </p:nvSpPr>
         <p:spPr>
           <a:xfrm>
-            <a:off x="3174950" y="2590056"/>
-            <a:ext cx="2705100" cy="641152"/>
+            <a:off x="3174950" y="3687068"/>
+            <a:ext cx="2705100" cy="1189732"/>
           </a:xfrm>
           <a:prstGeom prst="roundRect">
             <a:avLst>
-              <a:gd name="adj" fmla="val 11885"/>
+              <a:gd name="adj" fmla="val 6405"/>
             </a:avLst>
           </a:prstGeom>
           <a:solidFill>
@@ -11661,8 +11661,8 @@
         </p:nvSpPr>
         <p:spPr>
           <a:xfrm>
-            <a:off x="3194000" y="2590056"/>
-            <a:ext cx="0" cy="641152"/>
+            <a:off x="3194000" y="3687068"/>
+            <a:ext cx="0" cy="1189732"/>
           </a:xfrm>
           <a:prstGeom prst="line">
             <a:avLst/>
@@ -11684,8 +11684,8 @@
         </p:nvSpPr>
         <p:spPr>
           <a:xfrm>
-            <a:off x="3340001" y="2691557"/>
-            <a:ext cx="2461361" cy="133350"/>
+            <a:off x="3365450" y="3814018"/>
+            <a:ext cx="2409444" cy="133350"/>
           </a:xfrm>
           <a:prstGeom prst="rect">
             <a:avLst/>
@@ -11726,8 +11726,8 @@
         </p:nvSpPr>
         <p:spPr>
           <a:xfrm>
-            <a:off x="3340001" y="2863007"/>
-            <a:ext cx="2461361" cy="114300"/>
+            <a:off x="3365450" y="3985468"/>
+            <a:ext cx="2409444" cy="114300"/>
           </a:xfrm>
           <a:prstGeom prst="rect">
             <a:avLst/>
@@ -11765,8 +11765,8 @@
         </p:nvSpPr>
         <p:spPr>
           <a:xfrm>
-            <a:off x="3340001" y="3015407"/>
-            <a:ext cx="2461361" cy="114300"/>
+            <a:off x="3365450" y="4137868"/>
+            <a:ext cx="2409444" cy="114300"/>
           </a:xfrm>
           <a:prstGeom prst="rect">
             <a:avLst/>
@@ -11808,7 +11808,7 @@
         <p:spPr>
           <a:xfrm>
             <a:off x="6032450" y="787301"/>
-            <a:ext cx="1157883" cy="279202"/>
+            <a:ext cx="2705100" cy="279202"/>
           </a:xfrm>
           <a:prstGeom prst="roundRect">
             <a:avLst>
@@ -11840,7 +11840,7 @@
         <p:spPr>
           <a:xfrm>
             <a:off x="6159401" y="850702"/>
-            <a:ext cx="922062" cy="152400"/>
+            <a:ext cx="2500223" cy="152400"/>
           </a:xfrm>
           <a:prstGeom prst="rect">
             <a:avLst/>
@@ -11879,11 +11879,11 @@
         <p:spPr>
           <a:xfrm>
             <a:off x="6032450" y="1155353"/>
-            <a:ext cx="2705100" cy="818852"/>
+            <a:ext cx="2705100" cy="1822549"/>
           </a:xfrm>
           <a:prstGeom prst="roundRect">
             <a:avLst>
-              <a:gd name="adj" fmla="val 9306"/>
+              <a:gd name="adj" fmla="val 4181"/>
             </a:avLst>
           </a:prstGeom>
           <a:solidFill>
@@ -11918,7 +11918,7 @@
         <p:spPr>
           <a:xfrm>
             <a:off x="6051500" y="1155353"/>
-            <a:ext cx="0" cy="818852"/>
+            <a:ext cx="0" cy="1822549"/>
           </a:xfrm>
           <a:prstGeom prst="line">
             <a:avLst/>
@@ -11940,8 +11940,8 @@
         </p:nvSpPr>
         <p:spPr>
           <a:xfrm>
-            <a:off x="6197501" y="1256854"/>
-            <a:ext cx="2461361" cy="133350"/>
+            <a:off x="6222950" y="1282303"/>
+            <a:ext cx="2409444" cy="133350"/>
           </a:xfrm>
           <a:prstGeom prst="rect">
             <a:avLst/>
@@ -11982,8 +11982,8 @@
         </p:nvSpPr>
         <p:spPr>
           <a:xfrm>
-            <a:off x="6197501" y="1428304"/>
-            <a:ext cx="2461361" cy="114300"/>
+            <a:off x="6222950" y="1453753"/>
+            <a:ext cx="2409444" cy="114300"/>
           </a:xfrm>
           <a:prstGeom prst="rect">
             <a:avLst/>
@@ -12021,8 +12021,8 @@
         </p:nvSpPr>
         <p:spPr>
           <a:xfrm>
-            <a:off x="6197501" y="1567904"/>
-            <a:ext cx="2461361" cy="161925"/>
+            <a:off x="6222950" y="1593354"/>
+            <a:ext cx="2409444" cy="161925"/>
           </a:xfrm>
           <a:prstGeom prst="rect">
             <a:avLst/>
@@ -12063,8 +12063,8 @@
         </p:nvSpPr>
         <p:spPr>
           <a:xfrm>
-            <a:off x="6197501" y="1767929"/>
-            <a:ext cx="2461361" cy="104775"/>
+            <a:off x="6222950" y="1793379"/>
+            <a:ext cx="2409444" cy="104775"/>
           </a:xfrm>
           <a:prstGeom prst="rect">
             <a:avLst/>
@@ -12105,12 +12105,12 @@
         </p:nvSpPr>
         <p:spPr>
           <a:xfrm>
-            <a:off x="6032450" y="2050405"/>
-            <a:ext cx="2705100" cy="818852"/>
+            <a:off x="6032450" y="3054102"/>
+            <a:ext cx="2705100" cy="1822698"/>
           </a:xfrm>
           <a:prstGeom prst="roundRect">
             <a:avLst>
-              <a:gd name="adj" fmla="val 9306"/>
+              <a:gd name="adj" fmla="val 4181"/>
             </a:avLst>
           </a:prstGeom>
           <a:solidFill>
@@ -12144,8 +12144,8 @@
         </p:nvSpPr>
         <p:spPr>
           <a:xfrm>
-            <a:off x="6051500" y="2050405"/>
-            <a:ext cx="0" cy="818852"/>
+            <a:off x="6051500" y="3054102"/>
+            <a:ext cx="0" cy="1822698"/>
           </a:xfrm>
           <a:prstGeom prst="line">
             <a:avLst/>
@@ -12167,8 +12167,8 @@
         </p:nvSpPr>
         <p:spPr>
           <a:xfrm>
-            <a:off x="6197501" y="2151906"/>
-            <a:ext cx="2461361" cy="142875"/>
+            <a:off x="6222950" y="3181052"/>
+            <a:ext cx="2409444" cy="142875"/>
           </a:xfrm>
           <a:prstGeom prst="rect">
             <a:avLst/>
@@ -12209,8 +12209,8 @@
         </p:nvSpPr>
         <p:spPr>
           <a:xfrm>
-            <a:off x="6197501" y="2332881"/>
-            <a:ext cx="2461361" cy="114300"/>
+            <a:off x="6222950" y="3362027"/>
+            <a:ext cx="2409444" cy="114300"/>
           </a:xfrm>
           <a:prstGeom prst="rect">
             <a:avLst/>
@@ -12248,8 +12248,8 @@
         </p:nvSpPr>
         <p:spPr>
           <a:xfrm>
-            <a:off x="6197501" y="2472482"/>
-            <a:ext cx="2461361" cy="152400"/>
+            <a:off x="6222950" y="3501628"/>
+            <a:ext cx="2409444" cy="152400"/>
           </a:xfrm>
           <a:prstGeom prst="rect">
             <a:avLst/>
@@ -12290,8 +12290,8 @@
         </p:nvSpPr>
         <p:spPr>
           <a:xfrm>
-            <a:off x="6197501" y="2662982"/>
-            <a:ext cx="2461361" cy="104775"/>
+            <a:off x="6222950" y="3692128"/>
+            <a:ext cx="2409444" cy="104775"/>
           </a:xfrm>
           <a:prstGeom prst="rect">
             <a:avLst/>
@@ -12644,7 +12644,7 @@
         <p:spPr>
           <a:xfrm>
             <a:off x="317450" y="787301"/>
-            <a:ext cx="890736" cy="279202"/>
+            <a:ext cx="4127450" cy="279202"/>
           </a:xfrm>
           <a:prstGeom prst="roundRect">
             <a:avLst>
@@ -12676,7 +12676,7 @@
         <p:spPr>
           <a:xfrm>
             <a:off x="444401" y="850702"/>
-            <a:ext cx="649572" cy="152400"/>
+            <a:ext cx="3951021" cy="152400"/>
           </a:xfrm>
           <a:prstGeom prst="rect">
             <a:avLst/>
@@ -12715,11 +12715,11 @@
         <p:spPr>
           <a:xfrm>
             <a:off x="317450" y="1155353"/>
-            <a:ext cx="4127450" cy="666750"/>
+            <a:ext cx="4127450" cy="1041499"/>
           </a:xfrm>
           <a:prstGeom prst="roundRect">
             <a:avLst>
-              <a:gd name="adj" fmla="val 11429"/>
+              <a:gd name="adj" fmla="val 7316"/>
             </a:avLst>
           </a:prstGeom>
           <a:solidFill>
@@ -12754,7 +12754,7 @@
         <p:spPr>
           <a:xfrm>
             <a:off x="336500" y="1155353"/>
-            <a:ext cx="0" cy="666750"/>
+            <a:ext cx="0" cy="1041499"/>
           </a:xfrm>
           <a:prstGeom prst="line">
             <a:avLst/>
@@ -12776,8 +12776,8 @@
         </p:nvSpPr>
         <p:spPr>
           <a:xfrm>
-            <a:off x="495151" y="1269653"/>
-            <a:ext cx="3886352" cy="133350"/>
+            <a:off x="520601" y="1294954"/>
+            <a:ext cx="3834435" cy="133350"/>
           </a:xfrm>
           <a:prstGeom prst="rect">
             <a:avLst/>
@@ -12818,8 +12818,8 @@
         </p:nvSpPr>
         <p:spPr>
           <a:xfrm>
-            <a:off x="495151" y="1441103"/>
-            <a:ext cx="3886352" cy="114300"/>
+            <a:off x="520601" y="1466404"/>
+            <a:ext cx="3834435" cy="114300"/>
           </a:xfrm>
           <a:prstGeom prst="rect">
             <a:avLst/>
@@ -12857,8 +12857,8 @@
         </p:nvSpPr>
         <p:spPr>
           <a:xfrm>
-            <a:off x="495151" y="1593503"/>
-            <a:ext cx="3886352" cy="114300"/>
+            <a:off x="520601" y="1618804"/>
+            <a:ext cx="3834435" cy="114300"/>
           </a:xfrm>
           <a:prstGeom prst="rect">
             <a:avLst/>
@@ -12899,12 +12899,12 @@
         </p:nvSpPr>
         <p:spPr>
           <a:xfrm>
-            <a:off x="317450" y="1898303"/>
-            <a:ext cx="4127450" cy="666750"/>
+            <a:off x="317450" y="2273052"/>
+            <a:ext cx="4127450" cy="1041648"/>
           </a:xfrm>
           <a:prstGeom prst="roundRect">
             <a:avLst>
-              <a:gd name="adj" fmla="val 11429"/>
+              <a:gd name="adj" fmla="val 7315"/>
             </a:avLst>
           </a:prstGeom>
           <a:solidFill>
@@ -12938,8 +12938,8 @@
         </p:nvSpPr>
         <p:spPr>
           <a:xfrm>
-            <a:off x="336500" y="1898303"/>
-            <a:ext cx="0" cy="666750"/>
+            <a:off x="336500" y="2273052"/>
+            <a:ext cx="0" cy="1041648"/>
           </a:xfrm>
           <a:prstGeom prst="line">
             <a:avLst/>
@@ -12961,8 +12961,8 @@
         </p:nvSpPr>
         <p:spPr>
           <a:xfrm>
-            <a:off x="495151" y="2012603"/>
-            <a:ext cx="3886352" cy="133350"/>
+            <a:off x="520601" y="2412653"/>
+            <a:ext cx="3834435" cy="133350"/>
           </a:xfrm>
           <a:prstGeom prst="rect">
             <a:avLst/>
@@ -13003,8 +13003,8 @@
         </p:nvSpPr>
         <p:spPr>
           <a:xfrm>
-            <a:off x="495151" y="2184053"/>
-            <a:ext cx="3886352" cy="114300"/>
+            <a:off x="520601" y="2584103"/>
+            <a:ext cx="3834435" cy="114300"/>
           </a:xfrm>
           <a:prstGeom prst="rect">
             <a:avLst/>
@@ -13042,8 +13042,8 @@
         </p:nvSpPr>
         <p:spPr>
           <a:xfrm>
-            <a:off x="495151" y="2336453"/>
-            <a:ext cx="3886352" cy="114300"/>
+            <a:off x="520601" y="2736503"/>
+            <a:ext cx="3834435" cy="114300"/>
           </a:xfrm>
           <a:prstGeom prst="rect">
             <a:avLst/>
@@ -13084,12 +13084,12 @@
         </p:nvSpPr>
         <p:spPr>
           <a:xfrm>
-            <a:off x="317450" y="2641253"/>
-            <a:ext cx="4127450" cy="666750"/>
+            <a:off x="317450" y="3390900"/>
+            <a:ext cx="4127450" cy="1041499"/>
           </a:xfrm>
           <a:prstGeom prst="roundRect">
             <a:avLst>
-              <a:gd name="adj" fmla="val 11429"/>
+              <a:gd name="adj" fmla="val 7316"/>
             </a:avLst>
           </a:prstGeom>
           <a:solidFill>
@@ -13123,8 +13123,8 @@
         </p:nvSpPr>
         <p:spPr>
           <a:xfrm>
-            <a:off x="336500" y="2641253"/>
-            <a:ext cx="0" cy="666750"/>
+            <a:off x="336500" y="3390900"/>
+            <a:ext cx="0" cy="1041499"/>
           </a:xfrm>
           <a:prstGeom prst="line">
             <a:avLst/>
@@ -13146,8 +13146,8 @@
         </p:nvSpPr>
         <p:spPr>
           <a:xfrm>
-            <a:off x="495151" y="2755553"/>
-            <a:ext cx="3886352" cy="133350"/>
+            <a:off x="520601" y="3530501"/>
+            <a:ext cx="3834435" cy="133350"/>
           </a:xfrm>
           <a:prstGeom prst="rect">
             <a:avLst/>
@@ -13188,8 +13188,8 @@
         </p:nvSpPr>
         <p:spPr>
           <a:xfrm>
-            <a:off x="495151" y="2927003"/>
-            <a:ext cx="3886352" cy="114300"/>
+            <a:off x="520601" y="3701951"/>
+            <a:ext cx="3834435" cy="114300"/>
           </a:xfrm>
           <a:prstGeom prst="rect">
             <a:avLst/>
@@ -13227,8 +13227,8 @@
         </p:nvSpPr>
         <p:spPr>
           <a:xfrm>
-            <a:off x="495151" y="3079403"/>
-            <a:ext cx="3886352" cy="114300"/>
+            <a:off x="520601" y="3854351"/>
+            <a:ext cx="3834435" cy="114300"/>
           </a:xfrm>
           <a:prstGeom prst="rect">
             <a:avLst/>
@@ -13270,7 +13270,7 @@
         <p:spPr>
           <a:xfrm>
             <a:off x="4635401" y="787301"/>
-            <a:ext cx="1383804" cy="279202"/>
+            <a:ext cx="4127450" cy="279202"/>
           </a:xfrm>
           <a:prstGeom prst="roundRect">
             <a:avLst>
@@ -13302,7 +13302,7 @@
         <p:spPr>
           <a:xfrm>
             <a:off x="4762351" y="850702"/>
-            <a:ext cx="1152501" cy="152400"/>
+            <a:ext cx="3951021" cy="152400"/>
           </a:xfrm>
           <a:prstGeom prst="rect">
             <a:avLst/>
@@ -13341,11 +13341,11 @@
         <p:spPr>
           <a:xfrm>
             <a:off x="4635401" y="1155353"/>
-            <a:ext cx="4127450" cy="657225"/>
+            <a:ext cx="4127450" cy="1041499"/>
           </a:xfrm>
           <a:prstGeom prst="roundRect">
             <a:avLst>
-              <a:gd name="adj" fmla="val 11594"/>
+              <a:gd name="adj" fmla="val 7316"/>
             </a:avLst>
           </a:prstGeom>
           <a:solidFill>
@@ -13380,7 +13380,7 @@
         <p:spPr>
           <a:xfrm>
             <a:off x="4654451" y="1155353"/>
-            <a:ext cx="0" cy="657225"/>
+            <a:ext cx="0" cy="1041499"/>
           </a:xfrm>
           <a:prstGeom prst="line">
             <a:avLst/>
@@ -13402,8 +13402,8 @@
         </p:nvSpPr>
         <p:spPr>
           <a:xfrm>
-            <a:off x="4813102" y="1269653"/>
-            <a:ext cx="3886352" cy="133350"/>
+            <a:off x="4838551" y="1294954"/>
+            <a:ext cx="3834435" cy="133350"/>
           </a:xfrm>
           <a:prstGeom prst="rect">
             <a:avLst/>
@@ -13444,8 +13444,8 @@
         </p:nvSpPr>
         <p:spPr>
           <a:xfrm>
-            <a:off x="4813102" y="1441103"/>
-            <a:ext cx="3886352" cy="104775"/>
+            <a:off x="4838551" y="1466404"/>
+            <a:ext cx="3834435" cy="104775"/>
           </a:xfrm>
           <a:prstGeom prst="rect">
             <a:avLst/>
@@ -13483,8 +13483,8 @@
         </p:nvSpPr>
         <p:spPr>
           <a:xfrm>
-            <a:off x="4813102" y="1583978"/>
-            <a:ext cx="3886352" cy="114300"/>
+            <a:off x="4838551" y="1609279"/>
+            <a:ext cx="3834435" cy="114300"/>
           </a:xfrm>
           <a:prstGeom prst="rect">
             <a:avLst/>
@@ -13525,12 +13525,12 @@
         </p:nvSpPr>
         <p:spPr>
           <a:xfrm>
-            <a:off x="4635401" y="1888778"/>
-            <a:ext cx="4127450" cy="666750"/>
+            <a:off x="4635401" y="2273052"/>
+            <a:ext cx="4127450" cy="1041648"/>
           </a:xfrm>
           <a:prstGeom prst="roundRect">
             <a:avLst>
-              <a:gd name="adj" fmla="val 11429"/>
+              <a:gd name="adj" fmla="val 7315"/>
             </a:avLst>
           </a:prstGeom>
           <a:solidFill>
@@ -13564,8 +13564,8 @@
         </p:nvSpPr>
         <p:spPr>
           <a:xfrm>
-            <a:off x="4654451" y="1888778"/>
-            <a:ext cx="0" cy="666750"/>
+            <a:off x="4654451" y="2273052"/>
+            <a:ext cx="0" cy="1041648"/>
           </a:xfrm>
           <a:prstGeom prst="line">
             <a:avLst/>
@@ -13587,8 +13587,8 @@
         </p:nvSpPr>
         <p:spPr>
           <a:xfrm>
-            <a:off x="4813102" y="2003078"/>
-            <a:ext cx="3886352" cy="133350"/>
+            <a:off x="4838551" y="2412653"/>
+            <a:ext cx="3834435" cy="133350"/>
           </a:xfrm>
           <a:prstGeom prst="rect">
             <a:avLst/>
@@ -13629,8 +13629,8 @@
         </p:nvSpPr>
         <p:spPr>
           <a:xfrm>
-            <a:off x="4813102" y="2174528"/>
-            <a:ext cx="3886352" cy="114300"/>
+            <a:off x="4838551" y="2584103"/>
+            <a:ext cx="3834435" cy="114300"/>
           </a:xfrm>
           <a:prstGeom prst="rect">
             <a:avLst/>
@@ -13668,8 +13668,8 @@
         </p:nvSpPr>
         <p:spPr>
           <a:xfrm>
-            <a:off x="4813102" y="2326928"/>
-            <a:ext cx="3886352" cy="114300"/>
+            <a:off x="4838551" y="2736503"/>
+            <a:ext cx="3834435" cy="114300"/>
           </a:xfrm>
           <a:prstGeom prst="rect">
             <a:avLst/>
@@ -13710,12 +13710,12 @@
         </p:nvSpPr>
         <p:spPr>
           <a:xfrm>
-            <a:off x="4635401" y="2631728"/>
-            <a:ext cx="4127450" cy="666750"/>
+            <a:off x="4635401" y="3390900"/>
+            <a:ext cx="4127450" cy="1041499"/>
           </a:xfrm>
           <a:prstGeom prst="roundRect">
             <a:avLst>
-              <a:gd name="adj" fmla="val 11429"/>
+              <a:gd name="adj" fmla="val 7316"/>
             </a:avLst>
           </a:prstGeom>
           <a:solidFill>
@@ -13749,8 +13749,8 @@
         </p:nvSpPr>
         <p:spPr>
           <a:xfrm>
-            <a:off x="4654451" y="2631728"/>
-            <a:ext cx="0" cy="666750"/>
+            <a:off x="4654451" y="3390900"/>
+            <a:ext cx="0" cy="1041499"/>
           </a:xfrm>
           <a:prstGeom prst="line">
             <a:avLst/>
@@ -13772,8 +13772,8 @@
         </p:nvSpPr>
         <p:spPr>
           <a:xfrm>
-            <a:off x="4813102" y="2746028"/>
-            <a:ext cx="3886352" cy="133350"/>
+            <a:off x="4838551" y="3530501"/>
+            <a:ext cx="3834435" cy="133350"/>
           </a:xfrm>
           <a:prstGeom prst="rect">
             <a:avLst/>
@@ -13814,8 +13814,8 @@
         </p:nvSpPr>
         <p:spPr>
           <a:xfrm>
-            <a:off x="4813102" y="2917478"/>
-            <a:ext cx="3886352" cy="114300"/>
+            <a:off x="4838551" y="3701951"/>
+            <a:ext cx="3834435" cy="114300"/>
           </a:xfrm>
           <a:prstGeom prst="rect">
             <a:avLst/>
@@ -13853,8 +13853,8 @@
         </p:nvSpPr>
         <p:spPr>
           <a:xfrm>
-            <a:off x="4813102" y="3069878"/>
-            <a:ext cx="3886352" cy="114300"/>
+            <a:off x="4838551" y="3854351"/>
+            <a:ext cx="3834435" cy="114300"/>
           </a:xfrm>
           <a:prstGeom prst="rect">
             <a:avLst/>
@@ -14278,11 +14278,11 @@
         <p:spPr>
           <a:xfrm>
             <a:off x="317450" y="787301"/>
-            <a:ext cx="4178201" cy="1050578"/>
+            <a:ext cx="4178201" cy="1253877"/>
           </a:xfrm>
           <a:prstGeom prst="roundRect">
             <a:avLst>
-              <a:gd name="adj" fmla="val 9671"/>
+              <a:gd name="adj" fmla="val 8103"/>
             </a:avLst>
           </a:prstGeom>
           <a:solidFill>
@@ -14309,7 +14309,7 @@
         </p:nvSpPr>
         <p:spPr>
           <a:xfrm>
-            <a:off x="482882" y="965002"/>
+            <a:off x="482882" y="1066651"/>
             <a:ext cx="3847338" cy="114300"/>
           </a:xfrm>
           <a:prstGeom prst="rect">
@@ -14351,7 +14351,7 @@
         </p:nvSpPr>
         <p:spPr>
           <a:xfrm>
-            <a:off x="482882" y="1130052"/>
+            <a:off x="482882" y="1231702"/>
             <a:ext cx="3847338" cy="323850"/>
           </a:xfrm>
           <a:prstGeom prst="rect">
@@ -14390,7 +14390,7 @@
         </p:nvSpPr>
         <p:spPr>
           <a:xfrm>
-            <a:off x="482882" y="1517303"/>
+            <a:off x="482882" y="1618952"/>
             <a:ext cx="3847338" cy="123825"/>
           </a:xfrm>
           <a:prstGeom prst="rect">
@@ -14433,11 +14433,11 @@
         <p:spPr>
           <a:xfrm>
             <a:off x="4648051" y="787301"/>
-            <a:ext cx="4178350" cy="1050578"/>
+            <a:ext cx="4178350" cy="1253877"/>
           </a:xfrm>
           <a:prstGeom prst="roundRect">
             <a:avLst>
-              <a:gd name="adj" fmla="val 9671"/>
+              <a:gd name="adj" fmla="val 8103"/>
             </a:avLst>
           </a:prstGeom>
           <a:solidFill>
@@ -14464,7 +14464,7 @@
         </p:nvSpPr>
         <p:spPr>
           <a:xfrm>
-            <a:off x="4813481" y="965002"/>
+            <a:off x="4813481" y="1066651"/>
             <a:ext cx="3847490" cy="114300"/>
           </a:xfrm>
           <a:prstGeom prst="rect">
@@ -14506,7 +14506,7 @@
         </p:nvSpPr>
         <p:spPr>
           <a:xfrm>
-            <a:off x="4813481" y="1130052"/>
+            <a:off x="4813481" y="1231702"/>
             <a:ext cx="3847490" cy="342900"/>
           </a:xfrm>
           <a:prstGeom prst="rect">
@@ -14545,7 +14545,7 @@
         </p:nvSpPr>
         <p:spPr>
           <a:xfrm>
-            <a:off x="4813481" y="1536353"/>
+            <a:off x="4813481" y="1638002"/>
             <a:ext cx="3847490" cy="123825"/>
           </a:xfrm>
           <a:prstGeom prst="rect">
@@ -14587,7 +14587,7 @@
         </p:nvSpPr>
         <p:spPr>
           <a:xfrm>
-            <a:off x="317450" y="2412950"/>
+            <a:off x="317450" y="2667000"/>
             <a:ext cx="1145679" cy="279202"/>
           </a:xfrm>
           <a:prstGeom prst="roundRect">
@@ -14619,7 +14619,7 @@
         </p:nvSpPr>
         <p:spPr>
           <a:xfrm>
-            <a:off x="444401" y="2476351"/>
+            <a:off x="444401" y="2730401"/>
             <a:ext cx="909614" cy="152400"/>
           </a:xfrm>
           <a:prstGeom prst="rect">
@@ -14658,12 +14658,12 @@
         </p:nvSpPr>
         <p:spPr>
           <a:xfrm>
-            <a:off x="317450" y="2730401"/>
-            <a:ext cx="2031950" cy="857101"/>
+            <a:off x="317450" y="3022550"/>
+            <a:ext cx="2031950" cy="958602"/>
           </a:xfrm>
           <a:prstGeom prst="roundRect">
             <a:avLst>
-              <a:gd name="adj" fmla="val 8890"/>
+              <a:gd name="adj" fmla="val 7949"/>
             </a:avLst>
           </a:prstGeom>
           <a:solidFill>
@@ -14697,8 +14697,8 @@
         </p:nvSpPr>
         <p:spPr>
           <a:xfrm>
-            <a:off x="336500" y="2730401"/>
-            <a:ext cx="0" cy="857101"/>
+            <a:off x="336500" y="3022550"/>
+            <a:ext cx="0" cy="958602"/>
           </a:xfrm>
           <a:prstGeom prst="line">
             <a:avLst/>
@@ -14720,7 +14720,7 @@
         </p:nvSpPr>
         <p:spPr>
           <a:xfrm>
-            <a:off x="507950" y="2857351"/>
+            <a:off x="507950" y="3200251"/>
             <a:ext cx="1722831" cy="142875"/>
           </a:xfrm>
           <a:prstGeom prst="rect">
@@ -14762,7 +14762,7 @@
         </p:nvSpPr>
         <p:spPr>
           <a:xfrm>
-            <a:off x="507950" y="3050977"/>
+            <a:off x="507950" y="3393877"/>
             <a:ext cx="1722831" cy="114300"/>
           </a:xfrm>
           <a:prstGeom prst="rect">
@@ -14801,7 +14801,7 @@
         </p:nvSpPr>
         <p:spPr>
           <a:xfrm>
-            <a:off x="507950" y="3203377"/>
+            <a:off x="507950" y="3546277"/>
             <a:ext cx="1722831" cy="114300"/>
           </a:xfrm>
           <a:prstGeom prst="rect">
@@ -14843,7 +14843,7 @@
         </p:nvSpPr>
         <p:spPr>
           <a:xfrm>
-            <a:off x="507950" y="3355777"/>
+            <a:off x="507950" y="3698677"/>
             <a:ext cx="1722831" cy="104775"/>
           </a:xfrm>
           <a:prstGeom prst="rect">
@@ -14885,12 +14885,12 @@
         </p:nvSpPr>
         <p:spPr>
           <a:xfrm>
-            <a:off x="2476351" y="2730401"/>
-            <a:ext cx="2032099" cy="857101"/>
+            <a:off x="2476351" y="3022550"/>
+            <a:ext cx="2032099" cy="958602"/>
           </a:xfrm>
           <a:prstGeom prst="roundRect">
             <a:avLst>
-              <a:gd name="adj" fmla="val 8890"/>
+              <a:gd name="adj" fmla="val 7949"/>
             </a:avLst>
           </a:prstGeom>
           <a:solidFill>
@@ -14924,8 +14924,8 @@
         </p:nvSpPr>
         <p:spPr>
           <a:xfrm>
-            <a:off x="2495401" y="2730401"/>
-            <a:ext cx="0" cy="857101"/>
+            <a:off x="2495401" y="3022550"/>
+            <a:ext cx="0" cy="958602"/>
           </a:xfrm>
           <a:prstGeom prst="line">
             <a:avLst/>
@@ -14947,7 +14947,7 @@
         </p:nvSpPr>
         <p:spPr>
           <a:xfrm>
-            <a:off x="2666851" y="2857351"/>
+            <a:off x="2666851" y="3200251"/>
             <a:ext cx="1722983" cy="133350"/>
           </a:xfrm>
           <a:prstGeom prst="rect">
@@ -14989,7 +14989,7 @@
         </p:nvSpPr>
         <p:spPr>
           <a:xfrm>
-            <a:off x="2666851" y="3041452"/>
+            <a:off x="2666851" y="3384352"/>
             <a:ext cx="1722983" cy="104775"/>
           </a:xfrm>
           <a:prstGeom prst="rect">
@@ -15028,7 +15028,7 @@
         </p:nvSpPr>
         <p:spPr>
           <a:xfrm>
-            <a:off x="2666851" y="3184327"/>
+            <a:off x="2666851" y="3527227"/>
             <a:ext cx="1722983" cy="114300"/>
           </a:xfrm>
           <a:prstGeom prst="rect">
@@ -15070,7 +15070,7 @@
         </p:nvSpPr>
         <p:spPr>
           <a:xfrm>
-            <a:off x="2666851" y="3336727"/>
+            <a:off x="2666851" y="3679627"/>
             <a:ext cx="1722983" cy="104775"/>
           </a:xfrm>
           <a:prstGeom prst="rect">
@@ -15112,12 +15112,12 @@
         </p:nvSpPr>
         <p:spPr>
           <a:xfrm>
-            <a:off x="4635401" y="2730401"/>
-            <a:ext cx="2031950" cy="857101"/>
+            <a:off x="4635401" y="3022550"/>
+            <a:ext cx="2031950" cy="958602"/>
           </a:xfrm>
           <a:prstGeom prst="roundRect">
             <a:avLst>
-              <a:gd name="adj" fmla="val 8890"/>
+              <a:gd name="adj" fmla="val 7949"/>
             </a:avLst>
           </a:prstGeom>
           <a:solidFill>
@@ -15151,8 +15151,8 @@
         </p:nvSpPr>
         <p:spPr>
           <a:xfrm>
-            <a:off x="4654451" y="2730401"/>
-            <a:ext cx="0" cy="857101"/>
+            <a:off x="4654451" y="3022550"/>
+            <a:ext cx="0" cy="958602"/>
           </a:xfrm>
           <a:prstGeom prst="line">
             <a:avLst/>
@@ -15174,7 +15174,7 @@
         </p:nvSpPr>
         <p:spPr>
           <a:xfrm>
-            <a:off x="4825901" y="2857351"/>
+            <a:off x="4825901" y="3200251"/>
             <a:ext cx="1722831" cy="142875"/>
           </a:xfrm>
           <a:prstGeom prst="rect">
@@ -15216,7 +15216,7 @@
         </p:nvSpPr>
         <p:spPr>
           <a:xfrm>
-            <a:off x="4825901" y="3050977"/>
+            <a:off x="4825901" y="3393877"/>
             <a:ext cx="1722831" cy="104775"/>
           </a:xfrm>
           <a:prstGeom prst="rect">
@@ -15255,7 +15255,7 @@
         </p:nvSpPr>
         <p:spPr>
           <a:xfrm>
-            <a:off x="4825901" y="3193852"/>
+            <a:off x="4825901" y="3536752"/>
             <a:ext cx="1722831" cy="114300"/>
           </a:xfrm>
           <a:prstGeom prst="rect">
@@ -15297,7 +15297,7 @@
         </p:nvSpPr>
         <p:spPr>
           <a:xfrm>
-            <a:off x="4825901" y="3346252"/>
+            <a:off x="4825901" y="3689152"/>
             <a:ext cx="1722831" cy="104775"/>
           </a:xfrm>
           <a:prstGeom prst="rect">
@@ -15339,12 +15339,12 @@
         </p:nvSpPr>
         <p:spPr>
           <a:xfrm>
-            <a:off x="6794302" y="2730401"/>
-            <a:ext cx="2032099" cy="857101"/>
+            <a:off x="6794302" y="3022550"/>
+            <a:ext cx="2032099" cy="958602"/>
           </a:xfrm>
           <a:prstGeom prst="roundRect">
             <a:avLst>
-              <a:gd name="adj" fmla="val 8890"/>
+              <a:gd name="adj" fmla="val 7949"/>
             </a:avLst>
           </a:prstGeom>
           <a:solidFill>
@@ -15378,8 +15378,8 @@
         </p:nvSpPr>
         <p:spPr>
           <a:xfrm>
-            <a:off x="6813352" y="2730401"/>
-            <a:ext cx="0" cy="857101"/>
+            <a:off x="6813352" y="3022550"/>
+            <a:ext cx="0" cy="958602"/>
           </a:xfrm>
           <a:prstGeom prst="line">
             <a:avLst/>
@@ -15401,7 +15401,7 @@
         </p:nvSpPr>
         <p:spPr>
           <a:xfrm>
-            <a:off x="6984802" y="2857351"/>
+            <a:off x="6984802" y="3200251"/>
             <a:ext cx="1722983" cy="133350"/>
           </a:xfrm>
           <a:prstGeom prst="rect">
@@ -15443,7 +15443,7 @@
         </p:nvSpPr>
         <p:spPr>
           <a:xfrm>
-            <a:off x="6984802" y="3041452"/>
+            <a:off x="6984802" y="3384352"/>
             <a:ext cx="1722983" cy="104775"/>
           </a:xfrm>
           <a:prstGeom prst="rect">
@@ -15482,7 +15482,7 @@
         </p:nvSpPr>
         <p:spPr>
           <a:xfrm>
-            <a:off x="6984802" y="3184327"/>
+            <a:off x="6984802" y="3527227"/>
             <a:ext cx="1722983" cy="114300"/>
           </a:xfrm>
           <a:prstGeom prst="rect">
@@ -15524,7 +15524,7 @@
         </p:nvSpPr>
         <p:spPr>
           <a:xfrm>
-            <a:off x="6984802" y="3336727"/>
+            <a:off x="6984802" y="3679627"/>
             <a:ext cx="1722983" cy="104775"/>
           </a:xfrm>
           <a:prstGeom prst="rect">
@@ -15878,11 +15878,11 @@
         <p:spPr>
           <a:xfrm>
             <a:off x="317450" y="787301"/>
-            <a:ext cx="4178201" cy="901303"/>
+            <a:ext cx="4178201" cy="1066354"/>
           </a:xfrm>
           <a:prstGeom prst="roundRect">
             <a:avLst>
-              <a:gd name="adj" fmla="val 8454"/>
+              <a:gd name="adj" fmla="val 7146"/>
             </a:avLst>
           </a:prstGeom>
           <a:solidFill>
@@ -15913,50 +15913,8 @@
         </p:nvSpPr>
         <p:spPr>
           <a:xfrm>
-            <a:off x="504676" y="923776"/>
-            <a:ext cx="3879824" cy="95250"/>
-          </a:xfrm>
-          <a:prstGeom prst="rect">
-            <a:avLst/>
-          </a:prstGeom>
-          <a:noFill/>
-          <a:ln/>
-        </p:spPr>
-        <p:txBody>
-          <a:bodyPr wrap="square" lIns="0" tIns="0" rIns="0" bIns="0" rtlCol="0" anchor="t"/>
-          <a:lstStyle/>
-          <a:p>
-            <a:pPr algn="l" indent="0" marL="0">
-              <a:spcAft>
-                <a:spcPts val="200"/>
-              </a:spcAft>
-              <a:buNone/>
-            </a:pPr>
-            <a:r>
-              <a:rPr lang="en-US" sz="700" dirty="0">
-                <a:solidFill>
-                  <a:srgbClr val="64748B"/>
-                </a:solidFill>
-                <a:latin typeface="Arial" pitchFamily="34" charset="0"/>
-                <a:ea typeface="Arial" pitchFamily="34" charset="-122"/>
-                <a:cs typeface="Arial" pitchFamily="34" charset="-120"/>
-              </a:rPr>
-              <a:t>BEFORE</a:t>
-            </a:r>
-            <a:endParaRPr lang="en-US" sz="700" dirty="0"/>
-          </a:p>
-        </p:txBody>
-      </p:sp>
-      <p:sp>
-        <p:nvSpPr>
-          <p:cNvPr id="8" name="Text 6"/>
-          <p:cNvSpPr/>
-          <p:nvPr/>
-        </p:nvSpPr>
-        <p:spPr>
-          <a:xfrm>
-            <a:off x="504676" y="1044327"/>
-            <a:ext cx="3879824" cy="152400"/>
+            <a:off x="530126" y="974527"/>
+            <a:ext cx="3827907" cy="104775"/>
           </a:xfrm>
           <a:prstGeom prst="rect">
             <a:avLst/>
@@ -15975,7 +15933,49 @@
               <a:buNone/>
             </a:pPr>
             <a:r>
-              <a:rPr lang="en-US" sz="1000" b="1" dirty="0">
+              <a:rPr lang="en-US" sz="750" dirty="0">
+                <a:solidFill>
+                  <a:srgbClr val="64748B"/>
+                </a:solidFill>
+                <a:latin typeface="Arial" pitchFamily="34" charset="0"/>
+                <a:ea typeface="Arial" pitchFamily="34" charset="-122"/>
+                <a:cs typeface="Arial" pitchFamily="34" charset="-120"/>
+              </a:rPr>
+              <a:t>BEFORE</a:t>
+            </a:r>
+            <a:endParaRPr lang="en-US" sz="750" dirty="0"/>
+          </a:p>
+        </p:txBody>
+      </p:sp>
+      <p:sp>
+        <p:nvSpPr>
+          <p:cNvPr id="8" name="Text 6"/>
+          <p:cNvSpPr/>
+          <p:nvPr/>
+        </p:nvSpPr>
+        <p:spPr>
+          <a:xfrm>
+            <a:off x="530126" y="1117402"/>
+            <a:ext cx="3827907" cy="161925"/>
+          </a:xfrm>
+          <a:prstGeom prst="rect">
+            <a:avLst/>
+          </a:prstGeom>
+          <a:noFill/>
+          <a:ln/>
+        </p:spPr>
+        <p:txBody>
+          <a:bodyPr wrap="square" lIns="0" tIns="0" rIns="0" bIns="0" rtlCol="0" anchor="t"/>
+          <a:lstStyle/>
+          <a:p>
+            <a:pPr algn="l" indent="0" marL="0">
+              <a:spcAft>
+                <a:spcPts val="400"/>
+              </a:spcAft>
+              <a:buNone/>
+            </a:pPr>
+            <a:r>
+              <a:rPr lang="en-US" sz="1100" b="1" dirty="0">
                 <a:solidFill>
                   <a:srgbClr val="1E293B"/>
                 </a:solidFill>
@@ -15985,7 +15985,7 @@
               </a:rPr>
               <a:t>기존 챗봇</a:t>
             </a:r>
-            <a:endParaRPr lang="en-US" sz="1000" dirty="0"/>
+            <a:endParaRPr lang="en-US" sz="1100" dirty="0"/>
           </a:p>
         </p:txBody>
       </p:sp>
@@ -15997,24 +15997,24 @@
         </p:nvSpPr>
         <p:spPr>
           <a:xfrm>
-            <a:off x="504676" y="1234827"/>
-            <a:ext cx="3879824" cy="123825"/>
-          </a:xfrm>
-          <a:prstGeom prst="rect">
-            <a:avLst/>
-          </a:prstGeom>
-          <a:noFill/>
-          <a:ln/>
-        </p:spPr>
-        <p:txBody>
-          <a:bodyPr wrap="square" lIns="0" tIns="0" rIns="0" bIns="0" rtlCol="0" anchor="t"/>
-          <a:lstStyle/>
-          <a:p>
-            <a:pPr algn="l" indent="0" marL="0">
-              <a:buNone/>
-            </a:pPr>
-            <a:r>
-              <a:rPr lang="en-US" sz="800" dirty="0">
+            <a:off x="530126" y="1330077"/>
+            <a:ext cx="3827907" cy="142875"/>
+          </a:xfrm>
+          <a:prstGeom prst="rect">
+            <a:avLst/>
+          </a:prstGeom>
+          <a:noFill/>
+          <a:ln/>
+        </p:spPr>
+        <p:txBody>
+          <a:bodyPr wrap="square" lIns="0" tIns="0" rIns="0" bIns="0" rtlCol="0" anchor="t"/>
+          <a:lstStyle/>
+          <a:p>
+            <a:pPr algn="l" indent="0" marL="0">
+              <a:buNone/>
+            </a:pPr>
+            <a:r>
+              <a:rPr lang="en-US" sz="900" dirty="0">
                 <a:solidFill>
                   <a:srgbClr val="475569"/>
                 </a:solidFill>
@@ -16024,7 +16024,7 @@
               </a:rPr>
               <a:t>질문 → 답변</a:t>
             </a:r>
-            <a:endParaRPr lang="en-US" sz="800" dirty="0"/>
+            <a:endParaRPr lang="en-US" sz="900" dirty="0"/>
           </a:p>
         </p:txBody>
       </p:sp>
@@ -16036,8 +16036,8 @@
         </p:nvSpPr>
         <p:spPr>
           <a:xfrm>
-            <a:off x="504676" y="1396752"/>
-            <a:ext cx="3879824" cy="104775"/>
+            <a:off x="530126" y="1523702"/>
+            <a:ext cx="3827907" cy="114300"/>
           </a:xfrm>
           <a:prstGeom prst="rect">
             <a:avLst/>
@@ -16051,12 +16051,12 @@
           <a:p>
             <a:pPr algn="l" indent="0" marL="0">
               <a:spcBef>
-                <a:spcPts val="300"/>
+                <a:spcPts val="400"/>
               </a:spcBef>
               <a:buNone/>
             </a:pPr>
             <a:r>
-              <a:rPr lang="en-US" sz="700" dirty="0">
+              <a:rPr lang="en-US" sz="750" dirty="0">
                 <a:solidFill>
                   <a:srgbClr val="64748B"/>
                 </a:solidFill>
@@ -16064,9 +16064,9 @@
                 <a:ea typeface="Arial" pitchFamily="34" charset="-122"/>
                 <a:cs typeface="Arial" pitchFamily="34" charset="-120"/>
               </a:rPr>
-              <a:t>사람이 지시해야 동작</a:t>
-            </a:r>
-            <a:endParaRPr lang="en-US" sz="700" dirty="0"/>
+              <a:t>단순 Q&amp;A, 사람이 지시해야 동작</a:t>
+            </a:r>
+            <a:endParaRPr lang="en-US" sz="750" dirty="0"/>
           </a:p>
         </p:txBody>
       </p:sp>
@@ -16079,11 +16079,11 @@
         <p:spPr>
           <a:xfrm>
             <a:off x="4648051" y="787301"/>
-            <a:ext cx="4178350" cy="901303"/>
+            <a:ext cx="4178350" cy="1066354"/>
           </a:xfrm>
           <a:prstGeom prst="roundRect">
             <a:avLst>
-              <a:gd name="adj" fmla="val 8454"/>
+              <a:gd name="adj" fmla="val 7146"/>
             </a:avLst>
           </a:prstGeom>
           <a:solidFill>
@@ -16114,50 +16114,8 @@
         </p:nvSpPr>
         <p:spPr>
           <a:xfrm>
-            <a:off x="4835277" y="923776"/>
-            <a:ext cx="3879976" cy="95250"/>
-          </a:xfrm>
-          <a:prstGeom prst="rect">
-            <a:avLst/>
-          </a:prstGeom>
-          <a:noFill/>
-          <a:ln/>
-        </p:spPr>
-        <p:txBody>
-          <a:bodyPr wrap="square" lIns="0" tIns="0" rIns="0" bIns="0" rtlCol="0" anchor="t"/>
-          <a:lstStyle/>
-          <a:p>
-            <a:pPr algn="l" indent="0" marL="0">
-              <a:spcAft>
-                <a:spcPts val="200"/>
-              </a:spcAft>
-              <a:buNone/>
-            </a:pPr>
-            <a:r>
-              <a:rPr lang="en-US" sz="700" dirty="0">
-                <a:solidFill>
-                  <a:srgbClr val="06B6D4"/>
-                </a:solidFill>
-                <a:latin typeface="Arial" pitchFamily="34" charset="0"/>
-                <a:ea typeface="Arial" pitchFamily="34" charset="-122"/>
-                <a:cs typeface="Arial" pitchFamily="34" charset="-120"/>
-              </a:rPr>
-              <a:t>NOW &amp; NEXT</a:t>
-            </a:r>
-            <a:endParaRPr lang="en-US" sz="700" dirty="0"/>
-          </a:p>
-        </p:txBody>
-      </p:sp>
-      <p:sp>
-        <p:nvSpPr>
-          <p:cNvPr id="13" name="Text 11"/>
-          <p:cNvSpPr/>
-          <p:nvPr/>
-        </p:nvSpPr>
-        <p:spPr>
-          <a:xfrm>
-            <a:off x="4835277" y="1044327"/>
-            <a:ext cx="3879976" cy="152400"/>
+            <a:off x="4860727" y="974527"/>
+            <a:ext cx="3828059" cy="104775"/>
           </a:xfrm>
           <a:prstGeom prst="rect">
             <a:avLst/>
@@ -16176,7 +16134,49 @@
               <a:buNone/>
             </a:pPr>
             <a:r>
-              <a:rPr lang="en-US" sz="1000" b="1" dirty="0">
+              <a:rPr lang="en-US" sz="750" dirty="0">
+                <a:solidFill>
+                  <a:srgbClr val="06B6D4"/>
+                </a:solidFill>
+                <a:latin typeface="Arial" pitchFamily="34" charset="0"/>
+                <a:ea typeface="Arial" pitchFamily="34" charset="-122"/>
+                <a:cs typeface="Arial" pitchFamily="34" charset="-120"/>
+              </a:rPr>
+              <a:t>NOW &amp; NEXT</a:t>
+            </a:r>
+            <a:endParaRPr lang="en-US" sz="750" dirty="0"/>
+          </a:p>
+        </p:txBody>
+      </p:sp>
+      <p:sp>
+        <p:nvSpPr>
+          <p:cNvPr id="13" name="Text 11"/>
+          <p:cNvSpPr/>
+          <p:nvPr/>
+        </p:nvSpPr>
+        <p:spPr>
+          <a:xfrm>
+            <a:off x="4860727" y="1117402"/>
+            <a:ext cx="3828059" cy="161925"/>
+          </a:xfrm>
+          <a:prstGeom prst="rect">
+            <a:avLst/>
+          </a:prstGeom>
+          <a:noFill/>
+          <a:ln/>
+        </p:spPr>
+        <p:txBody>
+          <a:bodyPr wrap="square" lIns="0" tIns="0" rIns="0" bIns="0" rtlCol="0" anchor="t"/>
+          <a:lstStyle/>
+          <a:p>
+            <a:pPr algn="l" indent="0" marL="0">
+              <a:spcAft>
+                <a:spcPts val="400"/>
+              </a:spcAft>
+              <a:buNone/>
+            </a:pPr>
+            <a:r>
+              <a:rPr lang="en-US" sz="1100" b="1" dirty="0">
                 <a:solidFill>
                   <a:srgbClr val="FFFFFF"/>
                 </a:solidFill>
@@ -16186,7 +16186,7 @@
               </a:rPr>
               <a:t>AI 에이전트</a:t>
             </a:r>
-            <a:endParaRPr lang="en-US" sz="1000" dirty="0"/>
+            <a:endParaRPr lang="en-US" sz="1100" dirty="0"/>
           </a:p>
         </p:txBody>
       </p:sp>
@@ -16198,24 +16198,24 @@
         </p:nvSpPr>
         <p:spPr>
           <a:xfrm>
-            <a:off x="4835277" y="1234827"/>
-            <a:ext cx="3879976" cy="123825"/>
-          </a:xfrm>
-          <a:prstGeom prst="rect">
-            <a:avLst/>
-          </a:prstGeom>
-          <a:noFill/>
-          <a:ln/>
-        </p:spPr>
-        <p:txBody>
-          <a:bodyPr wrap="square" lIns="0" tIns="0" rIns="0" bIns="0" rtlCol="0" anchor="t"/>
-          <a:lstStyle/>
-          <a:p>
-            <a:pPr algn="l" indent="0" marL="0">
-              <a:buNone/>
-            </a:pPr>
-            <a:r>
-              <a:rPr lang="en-US" sz="800" dirty="0">
+            <a:off x="4860727" y="1330077"/>
+            <a:ext cx="3828059" cy="142875"/>
+          </a:xfrm>
+          <a:prstGeom prst="rect">
+            <a:avLst/>
+          </a:prstGeom>
+          <a:noFill/>
+          <a:ln/>
+        </p:spPr>
+        <p:txBody>
+          <a:bodyPr wrap="square" lIns="0" tIns="0" rIns="0" bIns="0" rtlCol="0" anchor="t"/>
+          <a:lstStyle/>
+          <a:p>
+            <a:pPr algn="l" indent="0" marL="0">
+              <a:buNone/>
+            </a:pPr>
+            <a:r>
+              <a:rPr lang="en-US" sz="900" dirty="0">
                 <a:solidFill>
                   <a:srgbClr val="94A3B8"/>
                 </a:solidFill>
@@ -16225,7 +16225,7 @@
               </a:rPr>
               <a:t>목표 → 계획 → 실행</a:t>
             </a:r>
-            <a:endParaRPr lang="en-US" sz="800" dirty="0"/>
+            <a:endParaRPr lang="en-US" sz="900" dirty="0"/>
           </a:p>
         </p:txBody>
       </p:sp>
@@ -16237,8 +16237,8 @@
         </p:nvSpPr>
         <p:spPr>
           <a:xfrm>
-            <a:off x="4835277" y="1396752"/>
-            <a:ext cx="3879976" cy="155377"/>
+            <a:off x="4860727" y="1511052"/>
+            <a:ext cx="3828059" cy="155377"/>
           </a:xfrm>
           <a:prstGeom prst="rect">
             <a:avLst/>
@@ -16551,12 +16551,12 @@
         </p:nvSpPr>
         <p:spPr>
           <a:xfrm>
-            <a:off x="317450" y="1815554"/>
-            <a:ext cx="2768650" cy="841177"/>
+            <a:off x="317450" y="2006054"/>
+            <a:ext cx="2768650" cy="1066502"/>
           </a:xfrm>
           <a:prstGeom prst="roundRect">
             <a:avLst>
-              <a:gd name="adj" fmla="val 9059"/>
+              <a:gd name="adj" fmla="val 7145"/>
             </a:avLst>
           </a:prstGeom>
           <a:solidFill>
@@ -16590,7 +16590,7 @@
         </p:nvSpPr>
         <p:spPr>
           <a:xfrm>
-            <a:off x="317450" y="1834604"/>
+            <a:off x="317450" y="2025104"/>
             <a:ext cx="2768650" cy="0"/>
           </a:xfrm>
           <a:prstGeom prst="line">
@@ -16613,8 +16613,8 @@
         </p:nvSpPr>
         <p:spPr>
           <a:xfrm>
-            <a:off x="444401" y="1980605"/>
-            <a:ext cx="2565044" cy="114300"/>
+            <a:off x="469850" y="2221855"/>
+            <a:ext cx="2513127" cy="133350"/>
           </a:xfrm>
           <a:prstGeom prst="rect">
             <a:avLst/>
@@ -16628,12 +16628,12 @@
           <a:p>
             <a:pPr algn="l" indent="0" marL="0">
               <a:spcAft>
-                <a:spcPts val="300"/>
+                <a:spcPts val="400"/>
               </a:spcAft>
               <a:buNone/>
             </a:pPr>
             <a:r>
-              <a:rPr lang="en-US" sz="850" b="1" dirty="0">
+              <a:rPr lang="en-US" sz="950" b="1" dirty="0">
                 <a:solidFill>
                   <a:srgbClr val="3B82F6"/>
                 </a:solidFill>
@@ -16643,7 +16643,7 @@
               </a:rPr>
               <a:t>OpenAI Operator</a:t>
             </a:r>
-            <a:endParaRPr lang="en-US" sz="850" dirty="0"/>
+            <a:endParaRPr lang="en-US" sz="950" dirty="0"/>
           </a:p>
         </p:txBody>
       </p:sp>
@@ -16655,24 +16655,24 @@
         </p:nvSpPr>
         <p:spPr>
           <a:xfrm>
-            <a:off x="444401" y="2133005"/>
-            <a:ext cx="2565044" cy="104775"/>
-          </a:xfrm>
-          <a:prstGeom prst="rect">
-            <a:avLst/>
-          </a:prstGeom>
-          <a:noFill/>
-          <a:ln/>
-        </p:spPr>
-        <p:txBody>
-          <a:bodyPr wrap="square" lIns="0" tIns="0" rIns="0" bIns="0" rtlCol="0" anchor="t"/>
-          <a:lstStyle/>
-          <a:p>
-            <a:pPr algn="l" indent="0" marL="0">
-              <a:buNone/>
-            </a:pPr>
-            <a:r>
-              <a:rPr lang="en-US" sz="700" dirty="0">
+            <a:off x="469850" y="2405955"/>
+            <a:ext cx="2513127" cy="114300"/>
+          </a:xfrm>
+          <a:prstGeom prst="rect">
+            <a:avLst/>
+          </a:prstGeom>
+          <a:noFill/>
+          <a:ln/>
+        </p:spPr>
+        <p:txBody>
+          <a:bodyPr wrap="square" lIns="0" tIns="0" rIns="0" bIns="0" rtlCol="0" anchor="t"/>
+          <a:lstStyle/>
+          <a:p>
+            <a:pPr algn="l" indent="0" marL="0">
+              <a:buNone/>
+            </a:pPr>
+            <a:r>
+              <a:rPr lang="en-US" sz="750" dirty="0">
                 <a:solidFill>
                   <a:srgbClr val="475569"/>
                 </a:solidFill>
@@ -16682,7 +16682,7 @@
               </a:rPr>
               <a:t>WebVoyager 벤치마크 1위</a:t>
             </a:r>
-            <a:endParaRPr lang="en-US" sz="700" dirty="0"/>
+            <a:endParaRPr lang="en-US" sz="750" dirty="0"/>
           </a:p>
         </p:txBody>
       </p:sp>
@@ -16694,8 +16694,50 @@
         </p:nvSpPr>
         <p:spPr>
           <a:xfrm>
-            <a:off x="444401" y="2275880"/>
-            <a:ext cx="2565044" cy="114300"/>
+            <a:off x="469850" y="2571006"/>
+            <a:ext cx="2513127" cy="171450"/>
+          </a:xfrm>
+          <a:prstGeom prst="rect">
+            <a:avLst/>
+          </a:prstGeom>
+          <a:noFill/>
+          <a:ln/>
+        </p:spPr>
+        <p:txBody>
+          <a:bodyPr wrap="square" lIns="0" tIns="0" rIns="0" bIns="0" rtlCol="0" anchor="t"/>
+          <a:lstStyle/>
+          <a:p>
+            <a:pPr algn="l" indent="0" marL="0">
+              <a:spcBef>
+                <a:spcPts val="400"/>
+              </a:spcBef>
+              <a:buNone/>
+            </a:pPr>
+            <a:r>
+              <a:rPr lang="en-US" sz="1200" b="1" dirty="0">
+                <a:solidFill>
+                  <a:srgbClr val="3B82F6"/>
+                </a:solidFill>
+                <a:latin typeface="Arial" pitchFamily="34" charset="0"/>
+                <a:ea typeface="Arial" pitchFamily="34" charset="-122"/>
+                <a:cs typeface="Arial" pitchFamily="34" charset="-120"/>
+              </a:rPr>
+              <a:t>87%</a:t>
+            </a:r>
+            <a:endParaRPr lang="en-US" sz="1200" dirty="0"/>
+          </a:p>
+        </p:txBody>
+      </p:sp>
+      <p:sp>
+        <p:nvSpPr>
+          <p:cNvPr id="21" name="Text 19"/>
+          <p:cNvSpPr/>
+          <p:nvPr/>
+        </p:nvSpPr>
+        <p:spPr>
+          <a:xfrm>
+            <a:off x="469850" y="2780556"/>
+            <a:ext cx="2513127" cy="104775"/>
           </a:xfrm>
           <a:prstGeom prst="rect">
             <a:avLst/>
@@ -16714,49 +16756,7 @@
               <a:buNone/>
             </a:pPr>
             <a:r>
-              <a:rPr lang="en-US" sz="800" b="1" dirty="0">
-                <a:solidFill>
-                  <a:srgbClr val="3B82F6"/>
-                </a:solidFill>
-                <a:latin typeface="Arial" pitchFamily="34" charset="0"/>
-                <a:ea typeface="Arial" pitchFamily="34" charset="-122"/>
-                <a:cs typeface="Arial" pitchFamily="34" charset="-120"/>
-              </a:rPr>
-              <a:t>87%</a:t>
-            </a:r>
-            <a:endParaRPr lang="en-US" sz="800" dirty="0"/>
-          </a:p>
-        </p:txBody>
-      </p:sp>
-      <p:sp>
-        <p:nvSpPr>
-          <p:cNvPr id="21" name="Text 19"/>
-          <p:cNvSpPr/>
-          <p:nvPr/>
-        </p:nvSpPr>
-        <p:spPr>
-          <a:xfrm>
-            <a:off x="444401" y="2415480"/>
-            <a:ext cx="2565044" cy="104775"/>
-          </a:xfrm>
-          <a:prstGeom prst="rect">
-            <a:avLst/>
-          </a:prstGeom>
-          <a:noFill/>
-          <a:ln/>
-        </p:spPr>
-        <p:txBody>
-          <a:bodyPr wrap="square" lIns="0" tIns="0" rIns="0" bIns="0" rtlCol="0" anchor="t"/>
-          <a:lstStyle/>
-          <a:p>
-            <a:pPr algn="l" indent="0" marL="0">
-              <a:spcBef>
-                <a:spcPts val="200"/>
-              </a:spcBef>
-              <a:buNone/>
-            </a:pPr>
-            <a:r>
-              <a:rPr lang="en-US" sz="650" dirty="0">
+              <a:rPr lang="en-US" sz="700" dirty="0">
                 <a:solidFill>
                   <a:srgbClr val="64748B"/>
                 </a:solidFill>
@@ -16764,9 +16764,9 @@
                 <a:ea typeface="Arial" pitchFamily="34" charset="-122"/>
                 <a:cs typeface="Arial" pitchFamily="34" charset="-120"/>
               </a:rPr>
-              <a:t>웹 자율 조작</a:t>
-            </a:r>
-            <a:endParaRPr lang="en-US" sz="650" dirty="0"/>
+              <a:t>웹 자율 조작 정확도</a:t>
+            </a:r>
+            <a:endParaRPr lang="en-US" sz="700" dirty="0"/>
           </a:p>
         </p:txBody>
       </p:sp>
@@ -16778,12 +16778,12 @@
         </p:nvSpPr>
         <p:spPr>
           <a:xfrm>
-            <a:off x="3187601" y="1815554"/>
-            <a:ext cx="2768650" cy="841177"/>
+            <a:off x="3187601" y="2006054"/>
+            <a:ext cx="2768650" cy="1066502"/>
           </a:xfrm>
           <a:prstGeom prst="roundRect">
             <a:avLst>
-              <a:gd name="adj" fmla="val 9059"/>
+              <a:gd name="adj" fmla="val 7145"/>
             </a:avLst>
           </a:prstGeom>
           <a:solidFill>
@@ -16817,7 +16817,7 @@
         </p:nvSpPr>
         <p:spPr>
           <a:xfrm>
-            <a:off x="3187601" y="1834604"/>
+            <a:off x="3187601" y="2025104"/>
             <a:ext cx="2768650" cy="0"/>
           </a:xfrm>
           <a:prstGeom prst="line">
@@ -16840,8 +16840,8 @@
         </p:nvSpPr>
         <p:spPr>
           <a:xfrm>
-            <a:off x="3314551" y="1980605"/>
-            <a:ext cx="2565044" cy="114300"/>
+            <a:off x="3340001" y="2221855"/>
+            <a:ext cx="2513127" cy="133350"/>
           </a:xfrm>
           <a:prstGeom prst="rect">
             <a:avLst/>
@@ -16855,12 +16855,12 @@
           <a:p>
             <a:pPr algn="l" indent="0" marL="0">
               <a:spcAft>
-                <a:spcPts val="300"/>
+                <a:spcPts val="400"/>
               </a:spcAft>
               <a:buNone/>
             </a:pPr>
             <a:r>
-              <a:rPr lang="en-US" sz="850" b="1" dirty="0">
+              <a:rPr lang="en-US" sz="950" b="1" dirty="0">
                 <a:solidFill>
                   <a:srgbClr val="06B6D4"/>
                 </a:solidFill>
@@ -16870,7 +16870,7 @@
               </a:rPr>
               <a:t>Anthropic MCP</a:t>
             </a:r>
-            <a:endParaRPr lang="en-US" sz="850" dirty="0"/>
+            <a:endParaRPr lang="en-US" sz="950" dirty="0"/>
           </a:p>
         </p:txBody>
       </p:sp>
@@ -16882,24 +16882,24 @@
         </p:nvSpPr>
         <p:spPr>
           <a:xfrm>
-            <a:off x="3314551" y="2133005"/>
-            <a:ext cx="2565044" cy="104775"/>
-          </a:xfrm>
-          <a:prstGeom prst="rect">
-            <a:avLst/>
-          </a:prstGeom>
-          <a:noFill/>
-          <a:ln/>
-        </p:spPr>
-        <p:txBody>
-          <a:bodyPr wrap="square" lIns="0" tIns="0" rIns="0" bIns="0" rtlCol="0" anchor="t"/>
-          <a:lstStyle/>
-          <a:p>
-            <a:pPr algn="l" indent="0" marL="0">
-              <a:buNone/>
-            </a:pPr>
-            <a:r>
-              <a:rPr lang="en-US" sz="700" dirty="0">
+            <a:off x="3340001" y="2405955"/>
+            <a:ext cx="2513127" cy="114300"/>
+          </a:xfrm>
+          <a:prstGeom prst="rect">
+            <a:avLst/>
+          </a:prstGeom>
+          <a:noFill/>
+          <a:ln/>
+        </p:spPr>
+        <p:txBody>
+          <a:bodyPr wrap="square" lIns="0" tIns="0" rIns="0" bIns="0" rtlCol="0" anchor="t"/>
+          <a:lstStyle/>
+          <a:p>
+            <a:pPr algn="l" indent="0" marL="0">
+              <a:buNone/>
+            </a:pPr>
+            <a:r>
+              <a:rPr lang="en-US" sz="750" dirty="0">
                 <a:solidFill>
                   <a:srgbClr val="475569"/>
                 </a:solidFill>
@@ -16907,9 +16907,9 @@
                 <a:ea typeface="Arial" pitchFamily="34" charset="-122"/>
                 <a:cs typeface="Arial" pitchFamily="34" charset="-120"/>
               </a:rPr>
-              <a:t>서버 10,000+개</a:t>
-            </a:r>
-            <a:endParaRPr lang="en-US" sz="700" dirty="0"/>
+              <a:t>서버 10,000+개 연동</a:t>
+            </a:r>
+            <a:endParaRPr lang="en-US" sz="750" dirty="0"/>
           </a:p>
         </p:txBody>
       </p:sp>
@@ -16921,8 +16921,50 @@
         </p:nvSpPr>
         <p:spPr>
           <a:xfrm>
-            <a:off x="3314551" y="2275880"/>
-            <a:ext cx="2565044" cy="123825"/>
+            <a:off x="3340001" y="2571006"/>
+            <a:ext cx="2513127" cy="180975"/>
+          </a:xfrm>
+          <a:prstGeom prst="rect">
+            <a:avLst/>
+          </a:prstGeom>
+          <a:noFill/>
+          <a:ln/>
+        </p:spPr>
+        <p:txBody>
+          <a:bodyPr wrap="square" lIns="0" tIns="0" rIns="0" bIns="0" rtlCol="0" anchor="t"/>
+          <a:lstStyle/>
+          <a:p>
+            <a:pPr algn="l" indent="0" marL="0">
+              <a:spcBef>
+                <a:spcPts val="400"/>
+              </a:spcBef>
+              <a:buNone/>
+            </a:pPr>
+            <a:r>
+              <a:rPr lang="en-US" sz="1200" b="1" dirty="0">
+                <a:solidFill>
+                  <a:srgbClr val="06B6D4"/>
+                </a:solidFill>
+                <a:latin typeface="Arial" pitchFamily="34" charset="0"/>
+                <a:ea typeface="Arial" pitchFamily="34" charset="-122"/>
+                <a:cs typeface="Arial" pitchFamily="34" charset="-120"/>
+              </a:rPr>
+              <a:t>9,700만/월</a:t>
+            </a:r>
+            <a:endParaRPr lang="en-US" sz="1200" dirty="0"/>
+          </a:p>
+        </p:txBody>
+      </p:sp>
+      <p:sp>
+        <p:nvSpPr>
+          <p:cNvPr id="27" name="Text 25"/>
+          <p:cNvSpPr/>
+          <p:nvPr/>
+        </p:nvSpPr>
+        <p:spPr>
+          <a:xfrm>
+            <a:off x="3340001" y="2790081"/>
+            <a:ext cx="2513127" cy="104775"/>
           </a:xfrm>
           <a:prstGeom prst="rect">
             <a:avLst/>
@@ -16941,49 +16983,7 @@
               <a:buNone/>
             </a:pPr>
             <a:r>
-              <a:rPr lang="en-US" sz="800" b="1" dirty="0">
-                <a:solidFill>
-                  <a:srgbClr val="06B6D4"/>
-                </a:solidFill>
-                <a:latin typeface="Arial" pitchFamily="34" charset="0"/>
-                <a:ea typeface="Arial" pitchFamily="34" charset="-122"/>
-                <a:cs typeface="Arial" pitchFamily="34" charset="-120"/>
-              </a:rPr>
-              <a:t>SDK 9,700만/월</a:t>
-            </a:r>
-            <a:endParaRPr lang="en-US" sz="800" dirty="0"/>
-          </a:p>
-        </p:txBody>
-      </p:sp>
-      <p:sp>
-        <p:nvSpPr>
-          <p:cNvPr id="27" name="Text 25"/>
-          <p:cNvSpPr/>
-          <p:nvPr/>
-        </p:nvSpPr>
-        <p:spPr>
-          <a:xfrm>
-            <a:off x="3314551" y="2425005"/>
-            <a:ext cx="2565044" cy="104775"/>
-          </a:xfrm>
-          <a:prstGeom prst="rect">
-            <a:avLst/>
-          </a:prstGeom>
-          <a:noFill/>
-          <a:ln/>
-        </p:spPr>
-        <p:txBody>
-          <a:bodyPr wrap="square" lIns="0" tIns="0" rIns="0" bIns="0" rtlCol="0" anchor="t"/>
-          <a:lstStyle/>
-          <a:p>
-            <a:pPr algn="l" indent="0" marL="0">
-              <a:spcBef>
-                <a:spcPts val="200"/>
-              </a:spcBef>
-              <a:buNone/>
-            </a:pPr>
-            <a:r>
-              <a:rPr lang="en-US" sz="650" dirty="0">
+              <a:rPr lang="en-US" sz="700" dirty="0">
                 <a:solidFill>
                   <a:srgbClr val="64748B"/>
                 </a:solidFill>
@@ -16993,7 +16993,7 @@
               </a:rPr>
               <a:t>AI 에이전트 표준 프로토콜</a:t>
             </a:r>
-            <a:endParaRPr lang="en-US" sz="650" dirty="0"/>
+            <a:endParaRPr lang="en-US" sz="700" dirty="0"/>
           </a:p>
         </p:txBody>
       </p:sp>
@@ -17005,12 +17005,12 @@
         </p:nvSpPr>
         <p:spPr>
           <a:xfrm>
-            <a:off x="6057751" y="1815554"/>
-            <a:ext cx="2768650" cy="841177"/>
+            <a:off x="6057751" y="2006054"/>
+            <a:ext cx="2768650" cy="1066502"/>
           </a:xfrm>
           <a:prstGeom prst="roundRect">
             <a:avLst>
-              <a:gd name="adj" fmla="val 9059"/>
+              <a:gd name="adj" fmla="val 7145"/>
             </a:avLst>
           </a:prstGeom>
           <a:solidFill>
@@ -17044,7 +17044,7 @@
         </p:nvSpPr>
         <p:spPr>
           <a:xfrm>
-            <a:off x="6057751" y="1834604"/>
+            <a:off x="6057751" y="2025104"/>
             <a:ext cx="2768650" cy="0"/>
           </a:xfrm>
           <a:prstGeom prst="line">
@@ -17067,8 +17067,8 @@
         </p:nvSpPr>
         <p:spPr>
           <a:xfrm>
-            <a:off x="6184702" y="1980605"/>
-            <a:ext cx="2565044" cy="114300"/>
+            <a:off x="6210151" y="2221855"/>
+            <a:ext cx="2513127" cy="133350"/>
           </a:xfrm>
           <a:prstGeom prst="rect">
             <a:avLst/>
@@ -17082,12 +17082,12 @@
           <a:p>
             <a:pPr algn="l" indent="0" marL="0">
               <a:spcAft>
-                <a:spcPts val="300"/>
+                <a:spcPts val="400"/>
               </a:spcAft>
               <a:buNone/>
             </a:pPr>
             <a:r>
-              <a:rPr lang="en-US" sz="850" b="1" dirty="0">
+              <a:rPr lang="en-US" sz="950" b="1" dirty="0">
                 <a:solidFill>
                   <a:srgbClr val="F43F5E"/>
                 </a:solidFill>
@@ -17097,7 +17097,7 @@
               </a:rPr>
               <a:t>Salesforce Agentforce</a:t>
             </a:r>
-            <a:endParaRPr lang="en-US" sz="850" dirty="0"/>
+            <a:endParaRPr lang="en-US" sz="950" dirty="0"/>
           </a:p>
         </p:txBody>
       </p:sp>
@@ -17109,24 +17109,24 @@
         </p:nvSpPr>
         <p:spPr>
           <a:xfrm>
-            <a:off x="6184702" y="2133005"/>
-            <a:ext cx="2565044" cy="104775"/>
-          </a:xfrm>
-          <a:prstGeom prst="rect">
-            <a:avLst/>
-          </a:prstGeom>
-          <a:noFill/>
-          <a:ln/>
-        </p:spPr>
-        <p:txBody>
-          <a:bodyPr wrap="square" lIns="0" tIns="0" rIns="0" bIns="0" rtlCol="0" anchor="t"/>
-          <a:lstStyle/>
-          <a:p>
-            <a:pPr algn="l" indent="0" marL="0">
-              <a:buNone/>
-            </a:pPr>
-            <a:r>
-              <a:rPr lang="en-US" sz="700" dirty="0">
+            <a:off x="6210151" y="2405955"/>
+            <a:ext cx="2513127" cy="114300"/>
+          </a:xfrm>
+          <a:prstGeom prst="rect">
+            <a:avLst/>
+          </a:prstGeom>
+          <a:noFill/>
+          <a:ln/>
+        </p:spPr>
+        <p:txBody>
+          <a:bodyPr wrap="square" lIns="0" tIns="0" rIns="0" bIns="0" rtlCol="0" anchor="t"/>
+          <a:lstStyle/>
+          <a:p>
+            <a:pPr algn="l" indent="0" marL="0">
+              <a:buNone/>
+            </a:pPr>
+            <a:r>
+              <a:rPr lang="en-US" sz="750" dirty="0">
                 <a:solidFill>
                   <a:srgbClr val="475569"/>
                 </a:solidFill>
@@ -17134,9 +17134,9 @@
                 <a:ea typeface="Arial" pitchFamily="34" charset="-122"/>
                 <a:cs typeface="Arial" pitchFamily="34" charset="-120"/>
               </a:rPr>
-              <a:t>22,000건 거래</a:t>
-            </a:r>
-            <a:endParaRPr lang="en-US" sz="700" dirty="0"/>
+              <a:t>22,000건 거래 달성</a:t>
+            </a:r>
+            <a:endParaRPr lang="en-US" sz="750" dirty="0"/>
           </a:p>
         </p:txBody>
       </p:sp>
@@ -17148,8 +17148,50 @@
         </p:nvSpPr>
         <p:spPr>
           <a:xfrm>
-            <a:off x="6184702" y="2275880"/>
-            <a:ext cx="2565044" cy="123825"/>
+            <a:off x="6210151" y="2571006"/>
+            <a:ext cx="2513127" cy="180975"/>
+          </a:xfrm>
+          <a:prstGeom prst="rect">
+            <a:avLst/>
+          </a:prstGeom>
+          <a:noFill/>
+          <a:ln/>
+        </p:spPr>
+        <p:txBody>
+          <a:bodyPr wrap="square" lIns="0" tIns="0" rIns="0" bIns="0" rtlCol="0" anchor="t"/>
+          <a:lstStyle/>
+          <a:p>
+            <a:pPr algn="l" indent="0" marL="0">
+              <a:spcBef>
+                <a:spcPts val="400"/>
+              </a:spcBef>
+              <a:buNone/>
+            </a:pPr>
+            <a:r>
+              <a:rPr lang="en-US" sz="1200" b="1" dirty="0">
+                <a:solidFill>
+                  <a:srgbClr val="F43F5E"/>
+                </a:solidFill>
+                <a:latin typeface="Arial" pitchFamily="34" charset="0"/>
+                <a:ea typeface="Arial" pitchFamily="34" charset="-122"/>
+                <a:cs typeface="Arial" pitchFamily="34" charset="-120"/>
+              </a:rPr>
+              <a:t>84% 자동 해결</a:t>
+            </a:r>
+            <a:endParaRPr lang="en-US" sz="1200" dirty="0"/>
+          </a:p>
+        </p:txBody>
+      </p:sp>
+      <p:sp>
+        <p:nvSpPr>
+          <p:cNvPr id="33" name="Text 31"/>
+          <p:cNvSpPr/>
+          <p:nvPr/>
+        </p:nvSpPr>
+        <p:spPr>
+          <a:xfrm>
+            <a:off x="6210151" y="2790081"/>
+            <a:ext cx="2513127" cy="104775"/>
           </a:xfrm>
           <a:prstGeom prst="rect">
             <a:avLst/>
@@ -17168,49 +17210,7 @@
               <a:buNone/>
             </a:pPr>
             <a:r>
-              <a:rPr lang="en-US" sz="800" b="1" dirty="0">
-                <a:solidFill>
-                  <a:srgbClr val="F43F5E"/>
-                </a:solidFill>
-                <a:latin typeface="Arial" pitchFamily="34" charset="0"/>
-                <a:ea typeface="Arial" pitchFamily="34" charset="-122"/>
-                <a:cs typeface="Arial" pitchFamily="34" charset="-120"/>
-              </a:rPr>
-              <a:t>84% 자동 해결</a:t>
-            </a:r>
-            <a:endParaRPr lang="en-US" sz="800" dirty="0"/>
-          </a:p>
-        </p:txBody>
-      </p:sp>
-      <p:sp>
-        <p:nvSpPr>
-          <p:cNvPr id="33" name="Text 31"/>
-          <p:cNvSpPr/>
-          <p:nvPr/>
-        </p:nvSpPr>
-        <p:spPr>
-          <a:xfrm>
-            <a:off x="6184702" y="2425005"/>
-            <a:ext cx="2565044" cy="104775"/>
-          </a:xfrm>
-          <a:prstGeom prst="rect">
-            <a:avLst/>
-          </a:prstGeom>
-          <a:noFill/>
-          <a:ln/>
-        </p:spPr>
-        <p:txBody>
-          <a:bodyPr wrap="square" lIns="0" tIns="0" rIns="0" bIns="0" rtlCol="0" anchor="t"/>
-          <a:lstStyle/>
-          <a:p>
-            <a:pPr algn="l" indent="0" marL="0">
-              <a:spcBef>
-                <a:spcPts val="200"/>
-              </a:spcBef>
-              <a:buNone/>
-            </a:pPr>
-            <a:r>
-              <a:rPr lang="en-US" sz="650" dirty="0">
+              <a:rPr lang="en-US" sz="700" dirty="0">
                 <a:solidFill>
                   <a:srgbClr val="64748B"/>
                 </a:solidFill>
@@ -17220,7 +17220,7 @@
               </a:rPr>
               <a:t>기업 CRM AI 에이전트</a:t>
             </a:r>
-            <a:endParaRPr lang="en-US" sz="650" dirty="0"/>
+            <a:endParaRPr lang="en-US" sz="700" dirty="0"/>
           </a:p>
         </p:txBody>
       </p:sp>
@@ -17232,12 +17232,12 @@
         </p:nvSpPr>
         <p:spPr>
           <a:xfrm>
-            <a:off x="317450" y="2783681"/>
-            <a:ext cx="8508950" cy="326827"/>
+            <a:off x="317450" y="4613374"/>
+            <a:ext cx="8508950" cy="377726"/>
           </a:xfrm>
           <a:prstGeom prst="roundRect">
             <a:avLst>
-              <a:gd name="adj" fmla="val 23315"/>
+              <a:gd name="adj" fmla="val 20173"/>
             </a:avLst>
           </a:prstGeom>
           <a:solidFill>
@@ -17264,7 +17264,7 @@
         </p:nvSpPr>
         <p:spPr>
           <a:xfrm>
-            <a:off x="439574" y="2885182"/>
+            <a:off x="439574" y="4740325"/>
             <a:ext cx="8264703" cy="123825"/>
           </a:xfrm>
           <a:prstGeom prst="rect">
